--- a/teaching/CS472/Timetable/LLV-L1.pptx
+++ b/teaching/CS472/Timetable/LLV-L1.pptx
@@ -5,7 +5,7 @@
     <p:sldMasterId id="2147483648" r:id="rId1"/>
   </p:sldMasterIdLst>
   <p:notesMasterIdLst>
-    <p:notesMasterId r:id="rId22"/>
+    <p:notesMasterId r:id="rId26"/>
   </p:notesMasterIdLst>
   <p:sldIdLst>
     <p:sldId id="256" r:id="rId2"/>
@@ -28,6 +28,10 @@
     <p:sldId id="292" r:id="rId19"/>
     <p:sldId id="290" r:id="rId20"/>
     <p:sldId id="294" r:id="rId21"/>
+    <p:sldId id="295" r:id="rId22"/>
+    <p:sldId id="296" r:id="rId23"/>
+    <p:sldId id="297" r:id="rId24"/>
+    <p:sldId id="298" r:id="rId25"/>
   </p:sldIdLst>
   <p:sldSz cx="12192000" cy="6858000"/>
   <p:notesSz cx="6858000" cy="9144000"/>
@@ -1225,7 +1229,7 @@
             </a:pPr>
             <a:r>
               <a:rPr lang="en-GB" dirty="0"/>
-              <a:t>In this example, the developer asked ChatGPT about converting a character to its ASCII code in .NET. ChatGPT suggested using </a:t>
+              <a:t>In this example, the reviewer asked ChatGPT about converting a character to its ASCII code in .NET. ChatGPT suggested using </a:t>
             </a:r>
             <a:r>
               <a:rPr lang="en-GB" sz="1200" kern="1200" dirty="0">
@@ -1316,7 +1320,7 @@
             </a:pPr>
             <a:r>
               <a:rPr lang="en-GB" dirty="0"/>
-              <a:t>However, the developer did not merge the AI snippet directly. Instead, they rewrote the implementation using the improved approach, integrating it properly into the existing structure.</a:t>
+              <a:t>However, the maintainer did not merge the AI snippet directly. Instead, they rewrote the implementation using the improved approach, integrating it properly into the existing structure.</a:t>
             </a:r>
           </a:p>
           <a:p>
@@ -2831,6 +2835,566 @@
     <p:extLst>
       <p:ext uri="{BB962C8B-B14F-4D97-AF65-F5344CB8AC3E}">
         <p14:creationId xmlns:p14="http://schemas.microsoft.com/office/powerpoint/2010/main" val="3883821727"/>
+      </p:ext>
+    </p:extLst>
+  </p:cSld>
+  <p:clrMapOvr>
+    <a:masterClrMapping/>
+  </p:clrMapOvr>
+</p:notes>
+</file>
+
+<file path=ppt/notesSlides/notesSlide20.xml><?xml version="1.0" encoding="utf-8"?>
+<p:notes xmlns:a="http://schemas.openxmlformats.org/drawingml/2006/main" xmlns:r="http://schemas.openxmlformats.org/officeDocument/2006/relationships" xmlns:p="http://schemas.openxmlformats.org/presentationml/2006/main">
+  <p:cSld>
+    <p:spTree>
+      <p:nvGrpSpPr>
+        <p:cNvPr id="1" name="">
+          <a:extLst>
+            <a:ext uri="{FF2B5EF4-FFF2-40B4-BE49-F238E27FC236}">
+              <a16:creationId xmlns:a16="http://schemas.microsoft.com/office/drawing/2014/main" id="{DD4EDDB5-E1CA-C226-39FF-6D885594DD89}"/>
+            </a:ext>
+          </a:extLst>
+        </p:cNvPr>
+        <p:cNvGrpSpPr/>
+        <p:nvPr/>
+      </p:nvGrpSpPr>
+      <p:grpSpPr>
+        <a:xfrm>
+          <a:off x="0" y="0"/>
+          <a:ext cx="0" cy="0"/>
+          <a:chOff x="0" y="0"/>
+          <a:chExt cx="0" cy="0"/>
+        </a:xfrm>
+      </p:grpSpPr>
+      <p:sp>
+        <p:nvSpPr>
+          <p:cNvPr id="2" name="Slide Image Placeholder 1">
+            <a:extLst>
+              <a:ext uri="{FF2B5EF4-FFF2-40B4-BE49-F238E27FC236}">
+                <a16:creationId xmlns:a16="http://schemas.microsoft.com/office/drawing/2014/main" id="{10AA5F65-BEF6-F69F-1D85-F13F04372754}"/>
+              </a:ext>
+            </a:extLst>
+          </p:cNvPr>
+          <p:cNvSpPr>
+            <a:spLocks noGrp="1" noRot="1" noChangeAspect="1"/>
+          </p:cNvSpPr>
+          <p:nvPr>
+            <p:ph type="sldImg"/>
+          </p:nvPr>
+        </p:nvSpPr>
+        <p:spPr/>
+      </p:sp>
+      <p:sp>
+        <p:nvSpPr>
+          <p:cNvPr id="3" name="Notes Placeholder 2">
+            <a:extLst>
+              <a:ext uri="{FF2B5EF4-FFF2-40B4-BE49-F238E27FC236}">
+                <a16:creationId xmlns:a16="http://schemas.microsoft.com/office/drawing/2014/main" id="{73A8017F-2F4B-0648-9B64-FA3B90A4F8B4}"/>
+              </a:ext>
+            </a:extLst>
+          </p:cNvPr>
+          <p:cNvSpPr>
+            <a:spLocks noGrp="1"/>
+          </p:cNvSpPr>
+          <p:nvPr>
+            <p:ph type="body" idx="1"/>
+          </p:nvPr>
+        </p:nvSpPr>
+        <p:spPr/>
+        <p:txBody>
+          <a:bodyPr/>
+          <a:lstStyle/>
+          <a:p>
+            <a:pPr marL="171450" indent="-171450">
+              <a:buFont typeface="Arial" panose="020B0604020202020204" pitchFamily="34" charset="0"/>
+              <a:buChar char="•"/>
+            </a:pPr>
+            <a:r>
+              <a:rPr lang="en-GB" dirty="0"/>
+              <a:t>PA - Here we see cases where AI-generated code is directly integrated — either verbatim or slightly adapted. In these cases, AI functions as a code contributor.</a:t>
+            </a:r>
+          </a:p>
+          <a:p>
+            <a:pPr marL="171450" indent="-171450">
+              <a:buFont typeface="Arial" panose="020B0604020202020204" pitchFamily="34" charset="0"/>
+              <a:buChar char="•"/>
+            </a:pPr>
+            <a:r>
+              <a:rPr lang="en-GB" dirty="0"/>
+              <a:t>PN - Here the AI suggestion influences the developer’s reasoning, but the final code is reworked. The idea is adopted, but the structure is not preserved.</a:t>
+            </a:r>
+          </a:p>
+          <a:p>
+            <a:pPr marL="171450" marR="0" lvl="0" indent="-171450" algn="l" defTabSz="914400" rtl="0" eaLnBrk="1" fontAlgn="auto" latinLnBrk="0" hangingPunct="1">
+              <a:lnSpc>
+                <a:spcPct val="100000"/>
+              </a:lnSpc>
+              <a:spcBef>
+                <a:spcPts val="0"/>
+              </a:spcBef>
+              <a:spcAft>
+                <a:spcPts val="0"/>
+              </a:spcAft>
+              <a:buClrTx/>
+              <a:buSzTx/>
+              <a:buFont typeface="Arial" panose="020B0604020202020204" pitchFamily="34" charset="0"/>
+              <a:buChar char="•"/>
+              <a:tabLst/>
+              <a:defRPr/>
+            </a:pPr>
+            <a:r>
+              <a:rPr lang="en-GB" dirty="0"/>
+              <a:t>NE  - In these cases, AI does not produce executable code. Instead, it provides clarification, explanation, or system understanding.</a:t>
+            </a:r>
+          </a:p>
+          <a:p>
+            <a:pPr marL="171450" marR="0" lvl="0" indent="-171450" algn="l" defTabSz="914400" rtl="0" eaLnBrk="1" fontAlgn="auto" latinLnBrk="0" hangingPunct="1">
+              <a:lnSpc>
+                <a:spcPct val="100000"/>
+              </a:lnSpc>
+              <a:spcBef>
+                <a:spcPts val="0"/>
+              </a:spcBef>
+              <a:spcAft>
+                <a:spcPts val="0"/>
+              </a:spcAft>
+              <a:buClrTx/>
+              <a:buSzTx/>
+              <a:buFont typeface="Arial" panose="020B0604020202020204" pitchFamily="34" charset="0"/>
+              <a:buChar char="•"/>
+              <a:tabLst/>
+              <a:defRPr/>
+            </a:pPr>
+            <a:r>
+              <a:rPr lang="en-GB" dirty="0"/>
+              <a:t>CL  - Here AI-informed review surfaces deeper architectural issues. The proposed patch addresses a symptom, but architectural consistency governs the outcome.</a:t>
+            </a:r>
+          </a:p>
+          <a:p>
+            <a:pPr marL="171450" marR="0" lvl="0" indent="-171450" algn="l" defTabSz="914400" rtl="0" eaLnBrk="1" fontAlgn="auto" latinLnBrk="0" hangingPunct="1">
+              <a:lnSpc>
+                <a:spcPct val="100000"/>
+              </a:lnSpc>
+              <a:spcBef>
+                <a:spcPts val="0"/>
+              </a:spcBef>
+              <a:spcAft>
+                <a:spcPts val="0"/>
+              </a:spcAft>
+              <a:buClrTx/>
+              <a:buSzTx/>
+              <a:buFont typeface="Arial" panose="020B0604020202020204" pitchFamily="34" charset="0"/>
+              <a:buChar char="•"/>
+              <a:tabLst/>
+              <a:defRPr/>
+            </a:pPr>
+            <a:r>
+              <a:rPr lang="en-GB" dirty="0"/>
+              <a:t>AI plays multiple roles in PR workflows—used by both authors and reviewers—and its integration is governed by engineering judgment rather than technical correctness alone.</a:t>
+            </a:r>
+          </a:p>
+          <a:p>
+            <a:pPr marL="171450" marR="0" lvl="0" indent="-171450" algn="l" defTabSz="914400" rtl="0" eaLnBrk="1" fontAlgn="auto" latinLnBrk="0" hangingPunct="1">
+              <a:lnSpc>
+                <a:spcPct val="100000"/>
+              </a:lnSpc>
+              <a:spcBef>
+                <a:spcPts val="0"/>
+              </a:spcBef>
+              <a:spcAft>
+                <a:spcPts val="0"/>
+              </a:spcAft>
+              <a:buClrTx/>
+              <a:buSzTx/>
+              <a:buFont typeface="Arial" panose="020B0604020202020204" pitchFamily="34" charset="0"/>
+              <a:buChar char="•"/>
+              <a:tabLst/>
+              <a:defRPr/>
+            </a:pPr>
+            <a:r>
+              <a:rPr lang="en-GB" dirty="0"/>
+              <a:t>AI enters pull request workflows as a collaborative reasoning partner — but integration is ultimately governed by architectural discipline. That is what shapes outcomes.</a:t>
+            </a:r>
+          </a:p>
+          <a:p>
+            <a:pPr marL="171450" indent="-171450">
+              <a:buFont typeface="Arial" panose="020B0604020202020204" pitchFamily="34" charset="0"/>
+              <a:buChar char="•"/>
+            </a:pPr>
+            <a:endParaRPr lang="en-GB" dirty="0"/>
+          </a:p>
+        </p:txBody>
+      </p:sp>
+      <p:sp>
+        <p:nvSpPr>
+          <p:cNvPr id="4" name="Slide Number Placeholder 3">
+            <a:extLst>
+              <a:ext uri="{FF2B5EF4-FFF2-40B4-BE49-F238E27FC236}">
+                <a16:creationId xmlns:a16="http://schemas.microsoft.com/office/drawing/2014/main" id="{0C4A4FAC-B5DE-8CF8-4B35-EB6F5101C204}"/>
+              </a:ext>
+            </a:extLst>
+          </p:cNvPr>
+          <p:cNvSpPr>
+            <a:spLocks noGrp="1"/>
+          </p:cNvSpPr>
+          <p:nvPr>
+            <p:ph type="sldNum" sz="quarter" idx="5"/>
+          </p:nvPr>
+        </p:nvSpPr>
+        <p:spPr/>
+        <p:txBody>
+          <a:bodyPr/>
+          <a:lstStyle/>
+          <a:p>
+            <a:fld id="{83E35761-B443-A74D-9BA5-3B6258AF7342}" type="slidenum">
+              <a:rPr lang="en-US" smtClean="0"/>
+              <a:t>21</a:t>
+            </a:fld>
+            <a:endParaRPr lang="en-US"/>
+          </a:p>
+        </p:txBody>
+      </p:sp>
+    </p:spTree>
+    <p:extLst>
+      <p:ext uri="{BB962C8B-B14F-4D97-AF65-F5344CB8AC3E}">
+        <p14:creationId xmlns:p14="http://schemas.microsoft.com/office/powerpoint/2010/main" val="402114150"/>
+      </p:ext>
+    </p:extLst>
+  </p:cSld>
+  <p:clrMapOvr>
+    <a:masterClrMapping/>
+  </p:clrMapOvr>
+</p:notes>
+</file>
+
+<file path=ppt/notesSlides/notesSlide21.xml><?xml version="1.0" encoding="utf-8"?>
+<p:notes xmlns:a="http://schemas.openxmlformats.org/drawingml/2006/main" xmlns:r="http://schemas.openxmlformats.org/officeDocument/2006/relationships" xmlns:p="http://schemas.openxmlformats.org/presentationml/2006/main">
+  <p:cSld>
+    <p:spTree>
+      <p:nvGrpSpPr>
+        <p:cNvPr id="1" name="">
+          <a:extLst>
+            <a:ext uri="{FF2B5EF4-FFF2-40B4-BE49-F238E27FC236}">
+              <a16:creationId xmlns:a16="http://schemas.microsoft.com/office/drawing/2014/main" id="{AE10330E-DE9B-20A6-AB4D-1A9D3B12B382}"/>
+            </a:ext>
+          </a:extLst>
+        </p:cNvPr>
+        <p:cNvGrpSpPr/>
+        <p:nvPr/>
+      </p:nvGrpSpPr>
+      <p:grpSpPr>
+        <a:xfrm>
+          <a:off x="0" y="0"/>
+          <a:ext cx="0" cy="0"/>
+          <a:chOff x="0" y="0"/>
+          <a:chExt cx="0" cy="0"/>
+        </a:xfrm>
+      </p:grpSpPr>
+      <p:sp>
+        <p:nvSpPr>
+          <p:cNvPr id="2" name="Slide Image Placeholder 1">
+            <a:extLst>
+              <a:ext uri="{FF2B5EF4-FFF2-40B4-BE49-F238E27FC236}">
+                <a16:creationId xmlns:a16="http://schemas.microsoft.com/office/drawing/2014/main" id="{9C13DADA-B788-8E8E-307C-1C1B431D5365}"/>
+              </a:ext>
+            </a:extLst>
+          </p:cNvPr>
+          <p:cNvSpPr>
+            <a:spLocks noGrp="1" noRot="1" noChangeAspect="1"/>
+          </p:cNvSpPr>
+          <p:nvPr>
+            <p:ph type="sldImg"/>
+          </p:nvPr>
+        </p:nvSpPr>
+        <p:spPr/>
+      </p:sp>
+      <p:sp>
+        <p:nvSpPr>
+          <p:cNvPr id="3" name="Notes Placeholder 2">
+            <a:extLst>
+              <a:ext uri="{FF2B5EF4-FFF2-40B4-BE49-F238E27FC236}">
+                <a16:creationId xmlns:a16="http://schemas.microsoft.com/office/drawing/2014/main" id="{6180C32E-DCE9-7401-8397-84119456FA72}"/>
+              </a:ext>
+            </a:extLst>
+          </p:cNvPr>
+          <p:cNvSpPr>
+            <a:spLocks noGrp="1"/>
+          </p:cNvSpPr>
+          <p:nvPr>
+            <p:ph type="body" idx="1"/>
+          </p:nvPr>
+        </p:nvSpPr>
+        <p:spPr/>
+        <p:txBody>
+          <a:bodyPr/>
+          <a:lstStyle/>
+          <a:p>
+            <a:pPr marL="171450" indent="-171450">
+              <a:buFont typeface="Arial" panose="020B0604020202020204" pitchFamily="34" charset="0"/>
+              <a:buChar char="•"/>
+            </a:pPr>
+            <a:endParaRPr lang="en-GB" dirty="0"/>
+          </a:p>
+        </p:txBody>
+      </p:sp>
+      <p:sp>
+        <p:nvSpPr>
+          <p:cNvPr id="4" name="Slide Number Placeholder 3">
+            <a:extLst>
+              <a:ext uri="{FF2B5EF4-FFF2-40B4-BE49-F238E27FC236}">
+                <a16:creationId xmlns:a16="http://schemas.microsoft.com/office/drawing/2014/main" id="{2D31F1C6-ECE0-442C-2E7D-24533DB7A807}"/>
+              </a:ext>
+            </a:extLst>
+          </p:cNvPr>
+          <p:cNvSpPr>
+            <a:spLocks noGrp="1"/>
+          </p:cNvSpPr>
+          <p:nvPr>
+            <p:ph type="sldNum" sz="quarter" idx="5"/>
+          </p:nvPr>
+        </p:nvSpPr>
+        <p:spPr/>
+        <p:txBody>
+          <a:bodyPr/>
+          <a:lstStyle/>
+          <a:p>
+            <a:fld id="{83E35761-B443-A74D-9BA5-3B6258AF7342}" type="slidenum">
+              <a:rPr lang="en-US" smtClean="0"/>
+              <a:t>22</a:t>
+            </a:fld>
+            <a:endParaRPr lang="en-US"/>
+          </a:p>
+        </p:txBody>
+      </p:sp>
+    </p:spTree>
+    <p:extLst>
+      <p:ext uri="{BB962C8B-B14F-4D97-AF65-F5344CB8AC3E}">
+        <p14:creationId xmlns:p14="http://schemas.microsoft.com/office/powerpoint/2010/main" val="3112909342"/>
+      </p:ext>
+    </p:extLst>
+  </p:cSld>
+  <p:clrMapOvr>
+    <a:masterClrMapping/>
+  </p:clrMapOvr>
+</p:notes>
+</file>
+
+<file path=ppt/notesSlides/notesSlide22.xml><?xml version="1.0" encoding="utf-8"?>
+<p:notes xmlns:a="http://schemas.openxmlformats.org/drawingml/2006/main" xmlns:r="http://schemas.openxmlformats.org/officeDocument/2006/relationships" xmlns:p="http://schemas.openxmlformats.org/presentationml/2006/main">
+  <p:cSld>
+    <p:spTree>
+      <p:nvGrpSpPr>
+        <p:cNvPr id="1" name="">
+          <a:extLst>
+            <a:ext uri="{FF2B5EF4-FFF2-40B4-BE49-F238E27FC236}">
+              <a16:creationId xmlns:a16="http://schemas.microsoft.com/office/drawing/2014/main" id="{DD027DC0-0CAC-8138-A9DC-6EA0997331A5}"/>
+            </a:ext>
+          </a:extLst>
+        </p:cNvPr>
+        <p:cNvGrpSpPr/>
+        <p:nvPr/>
+      </p:nvGrpSpPr>
+      <p:grpSpPr>
+        <a:xfrm>
+          <a:off x="0" y="0"/>
+          <a:ext cx="0" cy="0"/>
+          <a:chOff x="0" y="0"/>
+          <a:chExt cx="0" cy="0"/>
+        </a:xfrm>
+      </p:grpSpPr>
+      <p:sp>
+        <p:nvSpPr>
+          <p:cNvPr id="2" name="Slide Image Placeholder 1">
+            <a:extLst>
+              <a:ext uri="{FF2B5EF4-FFF2-40B4-BE49-F238E27FC236}">
+                <a16:creationId xmlns:a16="http://schemas.microsoft.com/office/drawing/2014/main" id="{E2D09C36-7C46-C244-5336-62743D5AC35B}"/>
+              </a:ext>
+            </a:extLst>
+          </p:cNvPr>
+          <p:cNvSpPr>
+            <a:spLocks noGrp="1" noRot="1" noChangeAspect="1"/>
+          </p:cNvSpPr>
+          <p:nvPr>
+            <p:ph type="sldImg"/>
+          </p:nvPr>
+        </p:nvSpPr>
+        <p:spPr/>
+      </p:sp>
+      <p:sp>
+        <p:nvSpPr>
+          <p:cNvPr id="3" name="Notes Placeholder 2">
+            <a:extLst>
+              <a:ext uri="{FF2B5EF4-FFF2-40B4-BE49-F238E27FC236}">
+                <a16:creationId xmlns:a16="http://schemas.microsoft.com/office/drawing/2014/main" id="{0B8C7A42-333D-9B81-AB5D-6CC6AE30C87C}"/>
+              </a:ext>
+            </a:extLst>
+          </p:cNvPr>
+          <p:cNvSpPr>
+            <a:spLocks noGrp="1"/>
+          </p:cNvSpPr>
+          <p:nvPr>
+            <p:ph type="body" idx="1"/>
+          </p:nvPr>
+        </p:nvSpPr>
+        <p:spPr/>
+        <p:txBody>
+          <a:bodyPr/>
+          <a:lstStyle/>
+          <a:p>
+            <a:pPr marL="171450" indent="-171450">
+              <a:buFont typeface="Arial" panose="020B0604020202020204" pitchFamily="34" charset="0"/>
+              <a:buChar char="•"/>
+            </a:pPr>
+            <a:endParaRPr lang="en-GB" dirty="0"/>
+          </a:p>
+        </p:txBody>
+      </p:sp>
+      <p:sp>
+        <p:nvSpPr>
+          <p:cNvPr id="4" name="Slide Number Placeholder 3">
+            <a:extLst>
+              <a:ext uri="{FF2B5EF4-FFF2-40B4-BE49-F238E27FC236}">
+                <a16:creationId xmlns:a16="http://schemas.microsoft.com/office/drawing/2014/main" id="{A0D109E2-AB13-92EE-28D5-76BF6405A48A}"/>
+              </a:ext>
+            </a:extLst>
+          </p:cNvPr>
+          <p:cNvSpPr>
+            <a:spLocks noGrp="1"/>
+          </p:cNvSpPr>
+          <p:nvPr>
+            <p:ph type="sldNum" sz="quarter" idx="5"/>
+          </p:nvPr>
+        </p:nvSpPr>
+        <p:spPr/>
+        <p:txBody>
+          <a:bodyPr/>
+          <a:lstStyle/>
+          <a:p>
+            <a:fld id="{83E35761-B443-A74D-9BA5-3B6258AF7342}" type="slidenum">
+              <a:rPr lang="en-US" smtClean="0"/>
+              <a:t>23</a:t>
+            </a:fld>
+            <a:endParaRPr lang="en-US"/>
+          </a:p>
+        </p:txBody>
+      </p:sp>
+    </p:spTree>
+    <p:extLst>
+      <p:ext uri="{BB962C8B-B14F-4D97-AF65-F5344CB8AC3E}">
+        <p14:creationId xmlns:p14="http://schemas.microsoft.com/office/powerpoint/2010/main" val="735533355"/>
+      </p:ext>
+    </p:extLst>
+  </p:cSld>
+  <p:clrMapOvr>
+    <a:masterClrMapping/>
+  </p:clrMapOvr>
+</p:notes>
+</file>
+
+<file path=ppt/notesSlides/notesSlide23.xml><?xml version="1.0" encoding="utf-8"?>
+<p:notes xmlns:a="http://schemas.openxmlformats.org/drawingml/2006/main" xmlns:r="http://schemas.openxmlformats.org/officeDocument/2006/relationships" xmlns:p="http://schemas.openxmlformats.org/presentationml/2006/main">
+  <p:cSld>
+    <p:spTree>
+      <p:nvGrpSpPr>
+        <p:cNvPr id="1" name="">
+          <a:extLst>
+            <a:ext uri="{FF2B5EF4-FFF2-40B4-BE49-F238E27FC236}">
+              <a16:creationId xmlns:a16="http://schemas.microsoft.com/office/drawing/2014/main" id="{96E5595D-B37B-B033-AE66-F2BECABBFA5B}"/>
+            </a:ext>
+          </a:extLst>
+        </p:cNvPr>
+        <p:cNvGrpSpPr/>
+        <p:nvPr/>
+      </p:nvGrpSpPr>
+      <p:grpSpPr>
+        <a:xfrm>
+          <a:off x="0" y="0"/>
+          <a:ext cx="0" cy="0"/>
+          <a:chOff x="0" y="0"/>
+          <a:chExt cx="0" cy="0"/>
+        </a:xfrm>
+      </p:grpSpPr>
+      <p:sp>
+        <p:nvSpPr>
+          <p:cNvPr id="2" name="Slide Image Placeholder 1">
+            <a:extLst>
+              <a:ext uri="{FF2B5EF4-FFF2-40B4-BE49-F238E27FC236}">
+                <a16:creationId xmlns:a16="http://schemas.microsoft.com/office/drawing/2014/main" id="{52658DA8-9381-FABE-43A3-911D1C4D585C}"/>
+              </a:ext>
+            </a:extLst>
+          </p:cNvPr>
+          <p:cNvSpPr>
+            <a:spLocks noGrp="1" noRot="1" noChangeAspect="1"/>
+          </p:cNvSpPr>
+          <p:nvPr>
+            <p:ph type="sldImg"/>
+          </p:nvPr>
+        </p:nvSpPr>
+        <p:spPr/>
+      </p:sp>
+      <p:sp>
+        <p:nvSpPr>
+          <p:cNvPr id="3" name="Notes Placeholder 2">
+            <a:extLst>
+              <a:ext uri="{FF2B5EF4-FFF2-40B4-BE49-F238E27FC236}">
+                <a16:creationId xmlns:a16="http://schemas.microsoft.com/office/drawing/2014/main" id="{55C0118A-377A-DA3C-84D2-D12EB2CB590D}"/>
+              </a:ext>
+            </a:extLst>
+          </p:cNvPr>
+          <p:cNvSpPr>
+            <a:spLocks noGrp="1"/>
+          </p:cNvSpPr>
+          <p:nvPr>
+            <p:ph type="body" idx="1"/>
+          </p:nvPr>
+        </p:nvSpPr>
+        <p:spPr/>
+        <p:txBody>
+          <a:bodyPr/>
+          <a:lstStyle/>
+          <a:p>
+            <a:pPr marL="171450" indent="-171450">
+              <a:buFont typeface="Arial" panose="020B0604020202020204" pitchFamily="34" charset="0"/>
+              <a:buChar char="•"/>
+            </a:pPr>
+            <a:endParaRPr lang="en-GB" dirty="0"/>
+          </a:p>
+        </p:txBody>
+      </p:sp>
+      <p:sp>
+        <p:nvSpPr>
+          <p:cNvPr id="4" name="Slide Number Placeholder 3">
+            <a:extLst>
+              <a:ext uri="{FF2B5EF4-FFF2-40B4-BE49-F238E27FC236}">
+                <a16:creationId xmlns:a16="http://schemas.microsoft.com/office/drawing/2014/main" id="{EFAA914F-5E18-C161-6723-586A987B4A12}"/>
+              </a:ext>
+            </a:extLst>
+          </p:cNvPr>
+          <p:cNvSpPr>
+            <a:spLocks noGrp="1"/>
+          </p:cNvSpPr>
+          <p:nvPr>
+            <p:ph type="sldNum" sz="quarter" idx="5"/>
+          </p:nvPr>
+        </p:nvSpPr>
+        <p:spPr/>
+        <p:txBody>
+          <a:bodyPr/>
+          <a:lstStyle/>
+          <a:p>
+            <a:fld id="{83E35761-B443-A74D-9BA5-3B6258AF7342}" type="slidenum">
+              <a:rPr lang="en-US" smtClean="0"/>
+              <a:t>24</a:t>
+            </a:fld>
+            <a:endParaRPr lang="en-US"/>
+          </a:p>
+        </p:txBody>
+      </p:sp>
+    </p:spTree>
+    <p:extLst>
+      <p:ext uri="{BB962C8B-B14F-4D97-AF65-F5344CB8AC3E}">
+        <p14:creationId xmlns:p14="http://schemas.microsoft.com/office/powerpoint/2010/main" val="1670927648"/>
       </p:ext>
     </p:extLst>
   </p:cSld>
@@ -10540,7 +11104,7 @@
         <p:spPr>
           <a:xfrm>
             <a:off x="396083" y="1047871"/>
-            <a:ext cx="4647406" cy="1200329"/>
+            <a:ext cx="4647406" cy="1107996"/>
           </a:xfrm>
           <a:prstGeom prst="rect">
             <a:avLst/>
@@ -10559,11 +11123,11 @@
           <a:lstStyle/>
           <a:p>
             <a:r>
-              <a:rPr lang="en-GB" sz="2400" dirty="0">
+              <a:rPr lang="en-GB" sz="2200" dirty="0">
                 <a:latin typeface="Arial" panose="020B0604020202020204" pitchFamily="34" charset="0"/>
                 <a:cs typeface="Arial" panose="020B0604020202020204" pitchFamily="34" charset="0"/>
               </a:rPr>
-              <a:t>AI influenced the solution conceptually, but the patch was not structurally preserved.</a:t>
+              <a:t>AI influenced the solution conceptually, but the maintainer  did not structurally preserve the patch.</a:t>
             </a:r>
           </a:p>
         </p:txBody>
@@ -11479,7 +12043,7 @@
         <p:spPr>
           <a:xfrm>
             <a:off x="6519442" y="5225610"/>
-            <a:ext cx="4441835" cy="307777"/>
+            <a:ext cx="4441835" cy="276999"/>
           </a:xfrm>
           <a:prstGeom prst="rect">
             <a:avLst/>
@@ -11493,10 +12057,16 @@
           <a:lstStyle/>
           <a:p>
             <a:r>
-              <a:rPr lang="en-GB" sz="1400" dirty="0"/>
+              <a:rPr lang="en-GB" sz="1200" dirty="0">
+                <a:latin typeface="Arial" panose="020B0604020202020204" pitchFamily="34" charset="0"/>
+                <a:cs typeface="Arial" panose="020B0604020202020204" pitchFamily="34" charset="0"/>
+              </a:rPr>
               <a:t>Refined Code (After ChatGPT’s Suggestion)</a:t>
             </a:r>
-            <a:endParaRPr lang="en-US" sz="1400" dirty="0"/>
+            <a:endParaRPr lang="en-US" sz="1200" dirty="0">
+              <a:latin typeface="Arial" panose="020B0604020202020204" pitchFamily="34" charset="0"/>
+              <a:cs typeface="Arial" panose="020B0604020202020204" pitchFamily="34" charset="0"/>
+            </a:endParaRPr>
           </a:p>
         </p:txBody>
       </p:sp>
@@ -11539,6 +12109,46 @@
                 <a:cs typeface="Arial" panose="020B0604020202020204" pitchFamily="34" charset="0"/>
               </a:rPr>
               <a:t>Conceptual influence ≠ structural preservation</a:t>
+            </a:r>
+          </a:p>
+        </p:txBody>
+      </p:sp>
+      <p:sp>
+        <p:nvSpPr>
+          <p:cNvPr id="2" name="TextBox 1">
+            <a:extLst>
+              <a:ext uri="{FF2B5EF4-FFF2-40B4-BE49-F238E27FC236}">
+                <a16:creationId xmlns:a16="http://schemas.microsoft.com/office/drawing/2014/main" id="{06789FFF-8752-F794-7DE5-7426930EF3C1}"/>
+              </a:ext>
+            </a:extLst>
+          </p:cNvPr>
+          <p:cNvSpPr txBox="1"/>
+          <p:nvPr/>
+        </p:nvSpPr>
+        <p:spPr>
+          <a:xfrm>
+            <a:off x="10831287" y="632352"/>
+            <a:ext cx="1164402" cy="246221"/>
+          </a:xfrm>
+          <a:prstGeom prst="rect">
+            <a:avLst/>
+          </a:prstGeom>
+          <a:noFill/>
+          <a:ln>
+            <a:solidFill>
+              <a:srgbClr val="C00000"/>
+            </a:solidFill>
+          </a:ln>
+        </p:spPr>
+        <p:txBody>
+          <a:bodyPr wrap="square" rtlCol="0">
+            <a:spAutoFit/>
+          </a:bodyPr>
+          <a:lstStyle/>
+          <a:p>
+            <a:r>
+              <a:rPr lang="en-US" sz="1000" dirty="0"/>
+              <a:t>Repo maintainer</a:t>
             </a:r>
           </a:p>
         </p:txBody>
@@ -11600,6 +12210,33 @@
                                   </p:childTnLst>
                                 </p:cTn>
                               </p:par>
+                              <p:par>
+                                <p:cTn id="7" presetID="1" presetClass="entr" presetSubtype="0" fill="hold" grpId="0" nodeType="withEffect">
+                                  <p:stCondLst>
+                                    <p:cond delay="0"/>
+                                  </p:stCondLst>
+                                  <p:childTnLst>
+                                    <p:set>
+                                      <p:cBhvr>
+                                        <p:cTn id="8" dur="1" fill="hold">
+                                          <p:stCondLst>
+                                            <p:cond delay="0"/>
+                                          </p:stCondLst>
+                                        </p:cTn>
+                                        <p:tgtEl>
+                                          <p:spTgt spid="2"/>
+                                        </p:tgtEl>
+                                        <p:attrNameLst>
+                                          <p:attrName>style.visibility</p:attrName>
+                                        </p:attrNameLst>
+                                      </p:cBhvr>
+                                      <p:to>
+                                        <p:strVal val="visible"/>
+                                      </p:to>
+                                    </p:set>
+                                  </p:childTnLst>
+                                </p:cTn>
+                              </p:par>
                             </p:childTnLst>
                           </p:cTn>
                         </p:par>
@@ -11607,26 +12244,26 @@
                     </p:cTn>
                   </p:par>
                   <p:par>
-                    <p:cTn id="7" fill="hold">
+                    <p:cTn id="9" fill="hold">
                       <p:stCondLst>
                         <p:cond delay="indefinite"/>
                       </p:stCondLst>
                       <p:childTnLst>
                         <p:par>
-                          <p:cTn id="8" fill="hold">
+                          <p:cTn id="10" fill="hold">
                             <p:stCondLst>
                               <p:cond delay="0"/>
                             </p:stCondLst>
                             <p:childTnLst>
                               <p:par>
-                                <p:cTn id="9" presetID="1" presetClass="entr" presetSubtype="0" fill="hold" nodeType="clickEffect">
+                                <p:cTn id="11" presetID="1" presetClass="entr" presetSubtype="0" fill="hold" nodeType="clickEffect">
                                   <p:stCondLst>
                                     <p:cond delay="0"/>
                                   </p:stCondLst>
                                   <p:childTnLst>
                                     <p:set>
                                       <p:cBhvr>
-                                        <p:cTn id="10" dur="1" fill="hold">
+                                        <p:cTn id="12" dur="1" fill="hold">
                                           <p:stCondLst>
                                             <p:cond delay="0"/>
                                           </p:stCondLst>
@@ -11652,26 +12289,26 @@
                     </p:cTn>
                   </p:par>
                   <p:par>
-                    <p:cTn id="11" fill="hold">
+                    <p:cTn id="13" fill="hold">
                       <p:stCondLst>
                         <p:cond delay="indefinite"/>
                       </p:stCondLst>
                       <p:childTnLst>
                         <p:par>
-                          <p:cTn id="12" fill="hold">
+                          <p:cTn id="14" fill="hold">
                             <p:stCondLst>
                               <p:cond delay="0"/>
                             </p:stCondLst>
                             <p:childTnLst>
                               <p:par>
-                                <p:cTn id="13" presetID="1" presetClass="entr" presetSubtype="0" fill="hold" nodeType="clickEffect">
+                                <p:cTn id="15" presetID="1" presetClass="entr" presetSubtype="0" fill="hold" nodeType="clickEffect">
                                   <p:stCondLst>
                                     <p:cond delay="0"/>
                                   </p:stCondLst>
                                   <p:childTnLst>
                                     <p:set>
                                       <p:cBhvr>
-                                        <p:cTn id="14" dur="1" fill="hold">
+                                        <p:cTn id="16" dur="1" fill="hold">
                                           <p:stCondLst>
                                             <p:cond delay="0"/>
                                           </p:stCondLst>
@@ -11697,26 +12334,26 @@
                     </p:cTn>
                   </p:par>
                   <p:par>
-                    <p:cTn id="15" fill="hold">
+                    <p:cTn id="17" fill="hold">
                       <p:stCondLst>
                         <p:cond delay="indefinite"/>
                       </p:stCondLst>
                       <p:childTnLst>
                         <p:par>
-                          <p:cTn id="16" fill="hold">
+                          <p:cTn id="18" fill="hold">
                             <p:stCondLst>
                               <p:cond delay="0"/>
                             </p:stCondLst>
                             <p:childTnLst>
                               <p:par>
-                                <p:cTn id="17" presetID="1" presetClass="entr" presetSubtype="0" fill="hold" grpId="0" nodeType="clickEffect">
+                                <p:cTn id="19" presetID="1" presetClass="entr" presetSubtype="0" fill="hold" grpId="0" nodeType="clickEffect">
                                   <p:stCondLst>
                                     <p:cond delay="0"/>
                                   </p:stCondLst>
                                   <p:childTnLst>
                                     <p:set>
                                       <p:cBhvr>
-                                        <p:cTn id="18" dur="1" fill="hold">
+                                        <p:cTn id="20" dur="1" fill="hold">
                                           <p:stCondLst>
                                             <p:cond delay="0"/>
                                           </p:stCondLst>
@@ -11742,26 +12379,26 @@
                     </p:cTn>
                   </p:par>
                   <p:par>
-                    <p:cTn id="19" fill="hold">
+                    <p:cTn id="21" fill="hold">
                       <p:stCondLst>
                         <p:cond delay="indefinite"/>
                       </p:stCondLst>
                       <p:childTnLst>
                         <p:par>
-                          <p:cTn id="20" fill="hold">
+                          <p:cTn id="22" fill="hold">
                             <p:stCondLst>
                               <p:cond delay="0"/>
                             </p:stCondLst>
                             <p:childTnLst>
                               <p:par>
-                                <p:cTn id="21" presetID="1" presetClass="entr" presetSubtype="0" fill="hold" nodeType="clickEffect">
+                                <p:cTn id="23" presetID="1" presetClass="entr" presetSubtype="0" fill="hold" nodeType="clickEffect">
                                   <p:stCondLst>
                                     <p:cond delay="0"/>
                                   </p:stCondLst>
                                   <p:childTnLst>
                                     <p:set>
                                       <p:cBhvr>
-                                        <p:cTn id="22" dur="1" fill="hold">
+                                        <p:cTn id="24" dur="1" fill="hold">
                                           <p:stCondLst>
                                             <p:cond delay="0"/>
                                           </p:stCondLst>
@@ -11787,26 +12424,26 @@
                     </p:cTn>
                   </p:par>
                   <p:par>
-                    <p:cTn id="23" fill="hold">
+                    <p:cTn id="25" fill="hold">
                       <p:stCondLst>
                         <p:cond delay="indefinite"/>
                       </p:stCondLst>
                       <p:childTnLst>
                         <p:par>
-                          <p:cTn id="24" fill="hold">
+                          <p:cTn id="26" fill="hold">
                             <p:stCondLst>
                               <p:cond delay="0"/>
                             </p:stCondLst>
                             <p:childTnLst>
                               <p:par>
-                                <p:cTn id="25" presetID="1" presetClass="entr" presetSubtype="0" fill="hold" nodeType="clickEffect">
+                                <p:cTn id="27" presetID="1" presetClass="entr" presetSubtype="0" fill="hold" nodeType="clickEffect">
                                   <p:stCondLst>
                                     <p:cond delay="0"/>
                                   </p:stCondLst>
                                   <p:childTnLst>
                                     <p:set>
                                       <p:cBhvr>
-                                        <p:cTn id="26" dur="1" fill="hold">
+                                        <p:cTn id="28" dur="1" fill="hold">
                                           <p:stCondLst>
                                             <p:cond delay="0"/>
                                           </p:stCondLst>
@@ -11832,26 +12469,26 @@
                     </p:cTn>
                   </p:par>
                   <p:par>
-                    <p:cTn id="27" fill="hold">
+                    <p:cTn id="29" fill="hold">
                       <p:stCondLst>
                         <p:cond delay="indefinite"/>
                       </p:stCondLst>
                       <p:childTnLst>
                         <p:par>
-                          <p:cTn id="28" fill="hold">
+                          <p:cTn id="30" fill="hold">
                             <p:stCondLst>
                               <p:cond delay="0"/>
                             </p:stCondLst>
                             <p:childTnLst>
                               <p:par>
-                                <p:cTn id="29" presetID="1" presetClass="entr" presetSubtype="0" fill="hold" grpId="0" nodeType="clickEffect">
+                                <p:cTn id="31" presetID="1" presetClass="entr" presetSubtype="0" fill="hold" grpId="0" nodeType="clickEffect">
                                   <p:stCondLst>
                                     <p:cond delay="0"/>
                                   </p:stCondLst>
                                   <p:childTnLst>
                                     <p:set>
                                       <p:cBhvr>
-                                        <p:cTn id="30" dur="1" fill="hold">
+                                        <p:cTn id="32" dur="1" fill="hold">
                                           <p:stCondLst>
                                             <p:cond delay="0"/>
                                           </p:stCondLst>
@@ -11877,26 +12514,26 @@
                     </p:cTn>
                   </p:par>
                   <p:par>
-                    <p:cTn id="31" fill="hold">
+                    <p:cTn id="33" fill="hold">
                       <p:stCondLst>
                         <p:cond delay="indefinite"/>
                       </p:stCondLst>
                       <p:childTnLst>
                         <p:par>
-                          <p:cTn id="32" fill="hold">
+                          <p:cTn id="34" fill="hold">
                             <p:stCondLst>
                               <p:cond delay="0"/>
                             </p:stCondLst>
                             <p:childTnLst>
                               <p:par>
-                                <p:cTn id="33" presetID="1" presetClass="entr" presetSubtype="0" fill="hold" grpId="0" nodeType="clickEffect">
+                                <p:cTn id="35" presetID="1" presetClass="entr" presetSubtype="0" fill="hold" grpId="0" nodeType="clickEffect">
                                   <p:stCondLst>
                                     <p:cond delay="0"/>
                                   </p:stCondLst>
                                   <p:childTnLst>
                                     <p:set>
                                       <p:cBhvr>
-                                        <p:cTn id="34" dur="1" fill="hold">
+                                        <p:cTn id="36" dur="1" fill="hold">
                                           <p:stCondLst>
                                             <p:cond delay="0"/>
                                           </p:stCondLst>
@@ -11922,26 +12559,26 @@
                     </p:cTn>
                   </p:par>
                   <p:par>
-                    <p:cTn id="35" fill="hold">
+                    <p:cTn id="37" fill="hold">
                       <p:stCondLst>
                         <p:cond delay="indefinite"/>
                       </p:stCondLst>
                       <p:childTnLst>
                         <p:par>
-                          <p:cTn id="36" fill="hold">
+                          <p:cTn id="38" fill="hold">
                             <p:stCondLst>
                               <p:cond delay="0"/>
                             </p:stCondLst>
                             <p:childTnLst>
                               <p:par>
-                                <p:cTn id="37" presetID="1" presetClass="entr" presetSubtype="0" fill="hold" nodeType="clickEffect">
+                                <p:cTn id="39" presetID="1" presetClass="entr" presetSubtype="0" fill="hold" nodeType="clickEffect">
                                   <p:stCondLst>
                                     <p:cond delay="0"/>
                                   </p:stCondLst>
                                   <p:childTnLst>
                                     <p:set>
                                       <p:cBhvr>
-                                        <p:cTn id="38" dur="1" fill="hold">
+                                        <p:cTn id="40" dur="1" fill="hold">
                                           <p:stCondLst>
                                             <p:cond delay="0"/>
                                           </p:stCondLst>
@@ -11967,26 +12604,26 @@
                     </p:cTn>
                   </p:par>
                   <p:par>
-                    <p:cTn id="39" fill="hold">
+                    <p:cTn id="41" fill="hold">
                       <p:stCondLst>
                         <p:cond delay="indefinite"/>
                       </p:stCondLst>
                       <p:childTnLst>
                         <p:par>
-                          <p:cTn id="40" fill="hold">
+                          <p:cTn id="42" fill="hold">
                             <p:stCondLst>
                               <p:cond delay="0"/>
                             </p:stCondLst>
                             <p:childTnLst>
                               <p:par>
-                                <p:cTn id="41" presetID="1" presetClass="entr" presetSubtype="0" fill="hold" grpId="0" nodeType="clickEffect">
+                                <p:cTn id="43" presetID="1" presetClass="entr" presetSubtype="0" fill="hold" grpId="0" nodeType="clickEffect">
                                   <p:stCondLst>
                                     <p:cond delay="0"/>
                                   </p:stCondLst>
                                   <p:childTnLst>
                                     <p:set>
                                       <p:cBhvr>
-                                        <p:cTn id="42" dur="1" fill="hold">
+                                        <p:cTn id="44" dur="1" fill="hold">
                                           <p:stCondLst>
                                             <p:cond delay="0"/>
                                           </p:stCondLst>
@@ -12012,26 +12649,26 @@
                     </p:cTn>
                   </p:par>
                   <p:par>
-                    <p:cTn id="43" fill="hold">
+                    <p:cTn id="45" fill="hold">
                       <p:stCondLst>
                         <p:cond delay="indefinite"/>
                       </p:stCondLst>
                       <p:childTnLst>
                         <p:par>
-                          <p:cTn id="44" fill="hold">
+                          <p:cTn id="46" fill="hold">
                             <p:stCondLst>
                               <p:cond delay="0"/>
                             </p:stCondLst>
                             <p:childTnLst>
                               <p:par>
-                                <p:cTn id="45" presetID="1" presetClass="entr" presetSubtype="0" fill="hold" grpId="0" nodeType="clickEffect">
+                                <p:cTn id="47" presetID="1" presetClass="entr" presetSubtype="0" fill="hold" grpId="0" nodeType="clickEffect">
                                   <p:stCondLst>
                                     <p:cond delay="0"/>
                                   </p:stCondLst>
                                   <p:childTnLst>
                                     <p:set>
                                       <p:cBhvr>
-                                        <p:cTn id="46" dur="1" fill="hold">
+                                        <p:cTn id="48" dur="1" fill="hold">
                                           <p:stCondLst>
                                             <p:cond delay="0"/>
                                           </p:stCondLst>
@@ -12083,6 +12720,7 @@
       <p:bldP spid="56" grpId="0" animBg="1"/>
       <p:bldP spid="62" grpId="0"/>
       <p:bldP spid="1024" grpId="0" animBg="1"/>
+      <p:bldP spid="2" grpId="0" animBg="1"/>
     </p:bldLst>
   </p:timing>
 </p:sld>
@@ -12119,8 +12757,8 @@
         </p:nvSpPr>
         <p:spPr>
           <a:xfrm>
-            <a:off x="151404" y="881038"/>
-            <a:ext cx="4571067" cy="769441"/>
+            <a:off x="139638" y="974504"/>
+            <a:ext cx="4571067" cy="707886"/>
           </a:xfrm>
           <a:prstGeom prst="rect">
             <a:avLst/>
@@ -12139,11 +12777,11 @@
           <a:lstStyle/>
           <a:p>
             <a:r>
-              <a:rPr lang="en-GB" sz="2200" dirty="0">
+              <a:rPr lang="en-GB" sz="2000" dirty="0">
                 <a:latin typeface="Arial" panose="020B0604020202020204" pitchFamily="34" charset="0"/>
                 <a:cs typeface="Arial" panose="020B0604020202020204" pitchFamily="34" charset="0"/>
               </a:rPr>
-              <a:t>AI suggested a better approach; the implementation was rewritten.</a:t>
+              <a:t>AI suggested a better approach; the maintainer rewrote the implementation.</a:t>
             </a:r>
           </a:p>
         </p:txBody>
@@ -12402,9 +13040,9 @@
         <p:grpSpPr>
           <a:xfrm>
             <a:off x="4806759" y="4368641"/>
-            <a:ext cx="5359400" cy="1534189"/>
+            <a:ext cx="5359400" cy="1255631"/>
             <a:chOff x="4806759" y="4368641"/>
-            <a:chExt cx="5359400" cy="1534189"/>
+            <a:chExt cx="5359400" cy="1255631"/>
           </a:xfrm>
         </p:grpSpPr>
         <p:pic>
@@ -12423,6 +13061,7 @@
           </p:nvPicPr>
           <p:blipFill>
             <a:blip r:embed="rId6"/>
+            <a:srcRect b="21934"/>
             <a:stretch>
               <a:fillRect/>
             </a:stretch>
@@ -12430,7 +13069,7 @@
           <p:spPr>
             <a:xfrm>
               <a:off x="4806759" y="4632830"/>
-              <a:ext cx="5359400" cy="1270000"/>
+              <a:ext cx="5359400" cy="991442"/>
             </a:xfrm>
             <a:prstGeom prst="rect">
               <a:avLst/>
@@ -12503,52 +13142,6 @@
           </a:prstGeom>
         </p:spPr>
       </p:pic>
-      <p:sp>
-        <p:nvSpPr>
-          <p:cNvPr id="27" name="TextBox 26">
-            <a:extLst>
-              <a:ext uri="{FF2B5EF4-FFF2-40B4-BE49-F238E27FC236}">
-                <a16:creationId xmlns:a16="http://schemas.microsoft.com/office/drawing/2014/main" id="{666F6B1D-2126-FD7D-07BB-5A8FD0E65066}"/>
-              </a:ext>
-            </a:extLst>
-          </p:cNvPr>
-          <p:cNvSpPr txBox="1"/>
-          <p:nvPr/>
-        </p:nvSpPr>
-        <p:spPr>
-          <a:xfrm>
-            <a:off x="4663609" y="5972235"/>
-            <a:ext cx="6550230" cy="707886"/>
-          </a:xfrm>
-          <a:prstGeom prst="rect">
-            <a:avLst/>
-          </a:prstGeom>
-          <a:noFill/>
-          <a:ln w="28575">
-            <a:solidFill>
-              <a:srgbClr val="0000EA"/>
-            </a:solidFill>
-          </a:ln>
-        </p:spPr>
-        <p:txBody>
-          <a:bodyPr wrap="square" rtlCol="0">
-            <a:spAutoFit/>
-          </a:bodyPr>
-          <a:lstStyle/>
-          <a:p>
-            <a:pPr lvl="0">
-              <a:defRPr/>
-            </a:pPr>
-            <a:r>
-              <a:rPr lang="en-GB" sz="2000" dirty="0">
-                <a:latin typeface="Arial" panose="020B0604020202020204" pitchFamily="34" charset="0"/>
-                <a:cs typeface="Arial" panose="020B0604020202020204" pitchFamily="34" charset="0"/>
-              </a:rPr>
-              <a:t>This example shows how AI can streamline thinking, even when its patch is not directly integrated.</a:t>
-            </a:r>
-          </a:p>
-        </p:txBody>
-      </p:sp>
       <p:grpSp>
         <p:nvGrpSpPr>
           <p:cNvPr id="38" name="Group 37">
@@ -12879,9 +13472,9 @@
         <p:grpSpPr>
           <a:xfrm>
             <a:off x="6892288" y="3294519"/>
-            <a:ext cx="4631244" cy="2034566"/>
+            <a:ext cx="4793226" cy="2034566"/>
             <a:chOff x="6892288" y="3294519"/>
-            <a:chExt cx="4631244" cy="2034566"/>
+            <a:chExt cx="4793226" cy="2034566"/>
           </a:xfrm>
         </p:grpSpPr>
         <p:sp>
@@ -13105,7 +13698,7 @@
           <p:spPr>
             <a:xfrm>
               <a:off x="10422319" y="3655682"/>
-              <a:ext cx="1101213" cy="369332"/>
+              <a:ext cx="1263195" cy="369332"/>
             </a:xfrm>
             <a:prstGeom prst="rect">
               <a:avLst/>
@@ -13246,6 +13839,125 @@
               </a:ln>
               <a:noFill/>
             </a:endParaRPr>
+          </a:p>
+        </p:txBody>
+      </p:sp>
+      <p:sp>
+        <p:nvSpPr>
+          <p:cNvPr id="3" name="TextBox 2">
+            <a:extLst>
+              <a:ext uri="{FF2B5EF4-FFF2-40B4-BE49-F238E27FC236}">
+                <a16:creationId xmlns:a16="http://schemas.microsoft.com/office/drawing/2014/main" id="{3AB5C73B-87AF-4DC3-8C77-13224BAD760E}"/>
+              </a:ext>
+            </a:extLst>
+          </p:cNvPr>
+          <p:cNvSpPr txBox="1"/>
+          <p:nvPr/>
+        </p:nvSpPr>
+        <p:spPr>
+          <a:xfrm>
+            <a:off x="10422194" y="1137814"/>
+            <a:ext cx="1273153" cy="253916"/>
+          </a:xfrm>
+          <a:prstGeom prst="rect">
+            <a:avLst/>
+          </a:prstGeom>
+          <a:noFill/>
+          <a:ln>
+            <a:solidFill>
+              <a:srgbClr val="C00000"/>
+            </a:solidFill>
+          </a:ln>
+        </p:spPr>
+        <p:txBody>
+          <a:bodyPr wrap="square" rtlCol="0">
+            <a:spAutoFit/>
+          </a:bodyPr>
+          <a:lstStyle/>
+          <a:p>
+            <a:r>
+              <a:rPr lang="en-US" sz="1050" dirty="0">
+                <a:latin typeface="Arial" panose="020B0604020202020204" pitchFamily="34" charset="0"/>
+                <a:cs typeface="Arial" panose="020B0604020202020204" pitchFamily="34" charset="0"/>
+              </a:rPr>
+              <a:t>Repo maintainer</a:t>
+            </a:r>
+          </a:p>
+        </p:txBody>
+      </p:sp>
+      <p:pic>
+        <p:nvPicPr>
+          <p:cNvPr id="7" name="Picture 6">
+            <a:extLst>
+              <a:ext uri="{FF2B5EF4-FFF2-40B4-BE49-F238E27FC236}">
+                <a16:creationId xmlns:a16="http://schemas.microsoft.com/office/drawing/2014/main" id="{1F50E1EE-4A3E-692D-719F-06DD08E53100}"/>
+              </a:ext>
+            </a:extLst>
+          </p:cNvPr>
+          <p:cNvPicPr>
+            <a:picLocks noChangeAspect="1"/>
+          </p:cNvPicPr>
+          <p:nvPr/>
+        </p:nvPicPr>
+        <p:blipFill>
+          <a:blip r:embed="rId9"/>
+          <a:stretch>
+            <a:fillRect/>
+          </a:stretch>
+        </p:blipFill>
+        <p:spPr>
+          <a:xfrm>
+            <a:off x="4753023" y="5637130"/>
+            <a:ext cx="4614912" cy="422096"/>
+          </a:xfrm>
+          <a:prstGeom prst="rect">
+            <a:avLst/>
+          </a:prstGeom>
+        </p:spPr>
+      </p:pic>
+      <p:sp>
+        <p:nvSpPr>
+          <p:cNvPr id="9" name="TextBox 8">
+            <a:extLst>
+              <a:ext uri="{FF2B5EF4-FFF2-40B4-BE49-F238E27FC236}">
+                <a16:creationId xmlns:a16="http://schemas.microsoft.com/office/drawing/2014/main" id="{C947E5EB-E61D-0EC1-DD8D-28B168464F51}"/>
+              </a:ext>
+            </a:extLst>
+          </p:cNvPr>
+          <p:cNvSpPr txBox="1"/>
+          <p:nvPr/>
+        </p:nvSpPr>
+        <p:spPr>
+          <a:xfrm>
+            <a:off x="4722471" y="6047882"/>
+            <a:ext cx="6550230" cy="707886"/>
+          </a:xfrm>
+          <a:prstGeom prst="rect">
+            <a:avLst/>
+          </a:prstGeom>
+          <a:noFill/>
+          <a:ln w="28575">
+            <a:solidFill>
+              <a:srgbClr val="0000EA"/>
+            </a:solidFill>
+          </a:ln>
+        </p:spPr>
+        <p:txBody>
+          <a:bodyPr wrap="square" rtlCol="0">
+            <a:spAutoFit/>
+          </a:bodyPr>
+          <a:lstStyle/>
+          <a:p>
+            <a:pPr lvl="0">
+              <a:defRPr/>
+            </a:pPr>
+            <a:r>
+              <a:rPr lang="en-GB" sz="2000" dirty="0">
+                <a:latin typeface="Arial" panose="020B0604020202020204" pitchFamily="34" charset="0"/>
+                <a:cs typeface="Arial" panose="020B0604020202020204" pitchFamily="34" charset="0"/>
+              </a:rPr>
+              <a:t>This example shows how AI can streamline thinking, even when its patch is not directly integrated.</a:t>
+            </a:r>
           </a:p>
         </p:txBody>
       </p:sp>
@@ -13306,6 +14018,33 @@
                                   </p:childTnLst>
                                 </p:cTn>
                               </p:par>
+                              <p:par>
+                                <p:cTn id="7" presetID="1" presetClass="entr" presetSubtype="0" fill="hold" grpId="0" nodeType="withEffect">
+                                  <p:stCondLst>
+                                    <p:cond delay="0"/>
+                                  </p:stCondLst>
+                                  <p:childTnLst>
+                                    <p:set>
+                                      <p:cBhvr>
+                                        <p:cTn id="8" dur="1" fill="hold">
+                                          <p:stCondLst>
+                                            <p:cond delay="0"/>
+                                          </p:stCondLst>
+                                        </p:cTn>
+                                        <p:tgtEl>
+                                          <p:spTgt spid="3"/>
+                                        </p:tgtEl>
+                                        <p:attrNameLst>
+                                          <p:attrName>style.visibility</p:attrName>
+                                        </p:attrNameLst>
+                                      </p:cBhvr>
+                                      <p:to>
+                                        <p:strVal val="visible"/>
+                                      </p:to>
+                                    </p:set>
+                                  </p:childTnLst>
+                                </p:cTn>
+                              </p:par>
                             </p:childTnLst>
                           </p:cTn>
                         </p:par>
@@ -13313,26 +14052,26 @@
                     </p:cTn>
                   </p:par>
                   <p:par>
-                    <p:cTn id="7" fill="hold">
+                    <p:cTn id="9" fill="hold">
                       <p:stCondLst>
                         <p:cond delay="indefinite"/>
                       </p:stCondLst>
                       <p:childTnLst>
                         <p:par>
-                          <p:cTn id="8" fill="hold">
+                          <p:cTn id="10" fill="hold">
                             <p:stCondLst>
                               <p:cond delay="0"/>
                             </p:stCondLst>
                             <p:childTnLst>
                               <p:par>
-                                <p:cTn id="9" presetID="1" presetClass="entr" presetSubtype="0" fill="hold" nodeType="clickEffect">
+                                <p:cTn id="11" presetID="1" presetClass="entr" presetSubtype="0" fill="hold" nodeType="clickEffect">
                                   <p:stCondLst>
                                     <p:cond delay="0"/>
                                   </p:stCondLst>
                                   <p:childTnLst>
                                     <p:set>
                                       <p:cBhvr>
-                                        <p:cTn id="10" dur="1" fill="hold">
+                                        <p:cTn id="12" dur="1" fill="hold">
                                           <p:stCondLst>
                                             <p:cond delay="0"/>
                                           </p:stCondLst>
@@ -13358,26 +14097,26 @@
                     </p:cTn>
                   </p:par>
                   <p:par>
-                    <p:cTn id="11" fill="hold">
+                    <p:cTn id="13" fill="hold">
                       <p:stCondLst>
                         <p:cond delay="indefinite"/>
                       </p:stCondLst>
                       <p:childTnLst>
                         <p:par>
-                          <p:cTn id="12" fill="hold">
+                          <p:cTn id="14" fill="hold">
                             <p:stCondLst>
                               <p:cond delay="0"/>
                             </p:stCondLst>
                             <p:childTnLst>
                               <p:par>
-                                <p:cTn id="13" presetID="1" presetClass="entr" presetSubtype="0" fill="hold" nodeType="clickEffect">
+                                <p:cTn id="15" presetID="1" presetClass="entr" presetSubtype="0" fill="hold" nodeType="clickEffect">
                                   <p:stCondLst>
                                     <p:cond delay="0"/>
                                   </p:stCondLst>
                                   <p:childTnLst>
                                     <p:set>
                                       <p:cBhvr>
-                                        <p:cTn id="14" dur="1" fill="hold">
+                                        <p:cTn id="16" dur="1" fill="hold">
                                           <p:stCondLst>
                                             <p:cond delay="0"/>
                                           </p:stCondLst>
@@ -13403,26 +14142,26 @@
                     </p:cTn>
                   </p:par>
                   <p:par>
-                    <p:cTn id="15" fill="hold">
+                    <p:cTn id="17" fill="hold">
                       <p:stCondLst>
                         <p:cond delay="indefinite"/>
                       </p:stCondLst>
                       <p:childTnLst>
                         <p:par>
-                          <p:cTn id="16" fill="hold">
+                          <p:cTn id="18" fill="hold">
                             <p:stCondLst>
                               <p:cond delay="0"/>
                             </p:stCondLst>
                             <p:childTnLst>
                               <p:par>
-                                <p:cTn id="17" presetID="1" presetClass="entr" presetSubtype="0" fill="hold" nodeType="clickEffect">
+                                <p:cTn id="19" presetID="1" presetClass="entr" presetSubtype="0" fill="hold" nodeType="clickEffect">
                                   <p:stCondLst>
                                     <p:cond delay="0"/>
                                   </p:stCondLst>
                                   <p:childTnLst>
                                     <p:set>
                                       <p:cBhvr>
-                                        <p:cTn id="18" dur="1" fill="hold">
+                                        <p:cTn id="20" dur="1" fill="hold">
                                           <p:stCondLst>
                                             <p:cond delay="0"/>
                                           </p:stCondLst>
@@ -13448,26 +14187,26 @@
                     </p:cTn>
                   </p:par>
                   <p:par>
-                    <p:cTn id="19" fill="hold">
+                    <p:cTn id="21" fill="hold">
                       <p:stCondLst>
                         <p:cond delay="indefinite"/>
                       </p:stCondLst>
                       <p:childTnLst>
                         <p:par>
-                          <p:cTn id="20" fill="hold">
+                          <p:cTn id="22" fill="hold">
                             <p:stCondLst>
                               <p:cond delay="0"/>
                             </p:stCondLst>
                             <p:childTnLst>
                               <p:par>
-                                <p:cTn id="21" presetID="1" presetClass="entr" presetSubtype="0" fill="hold" nodeType="clickEffect">
+                                <p:cTn id="23" presetID="1" presetClass="entr" presetSubtype="0" fill="hold" nodeType="clickEffect">
                                   <p:stCondLst>
                                     <p:cond delay="0"/>
                                   </p:stCondLst>
                                   <p:childTnLst>
                                     <p:set>
                                       <p:cBhvr>
-                                        <p:cTn id="22" dur="1" fill="hold">
+                                        <p:cTn id="24" dur="1" fill="hold">
                                           <p:stCondLst>
                                             <p:cond delay="0"/>
                                           </p:stCondLst>
@@ -13493,26 +14232,26 @@
                     </p:cTn>
                   </p:par>
                   <p:par>
-                    <p:cTn id="23" fill="hold">
+                    <p:cTn id="25" fill="hold">
                       <p:stCondLst>
                         <p:cond delay="indefinite"/>
                       </p:stCondLst>
                       <p:childTnLst>
                         <p:par>
-                          <p:cTn id="24" fill="hold">
+                          <p:cTn id="26" fill="hold">
                             <p:stCondLst>
                               <p:cond delay="0"/>
                             </p:stCondLst>
                             <p:childTnLst>
                               <p:par>
-                                <p:cTn id="25" presetID="1" presetClass="entr" presetSubtype="0" fill="hold" grpId="0" nodeType="clickEffect">
+                                <p:cTn id="27" presetID="1" presetClass="entr" presetSubtype="0" fill="hold" grpId="0" nodeType="clickEffect">
                                   <p:stCondLst>
                                     <p:cond delay="0"/>
                                   </p:stCondLst>
                                   <p:childTnLst>
                                     <p:set>
                                       <p:cBhvr>
-                                        <p:cTn id="26" dur="1" fill="hold">
+                                        <p:cTn id="28" dur="1" fill="hold">
                                           <p:stCondLst>
                                             <p:cond delay="0"/>
                                           </p:stCondLst>
@@ -13532,14 +14271,14 @@
                                 </p:cTn>
                               </p:par>
                               <p:par>
-                                <p:cTn id="27" presetID="1" presetClass="entr" presetSubtype="0" fill="hold" grpId="0" nodeType="withEffect">
+                                <p:cTn id="29" presetID="1" presetClass="entr" presetSubtype="0" fill="hold" grpId="0" nodeType="withEffect">
                                   <p:stCondLst>
                                     <p:cond delay="0"/>
                                   </p:stCondLst>
                                   <p:childTnLst>
                                     <p:set>
                                       <p:cBhvr>
-                                        <p:cTn id="28" dur="1" fill="hold">
+                                        <p:cTn id="30" dur="1" fill="hold">
                                           <p:stCondLst>
                                             <p:cond delay="0"/>
                                           </p:stCondLst>
@@ -13559,14 +14298,14 @@
                                 </p:cTn>
                               </p:par>
                               <p:par>
-                                <p:cTn id="29" presetID="1" presetClass="entr" presetSubtype="0" fill="hold" nodeType="withEffect">
+                                <p:cTn id="31" presetID="1" presetClass="entr" presetSubtype="0" fill="hold" nodeType="withEffect">
                                   <p:stCondLst>
                                     <p:cond delay="0"/>
                                   </p:stCondLst>
                                   <p:childTnLst>
                                     <p:set>
                                       <p:cBhvr>
-                                        <p:cTn id="30" dur="1" fill="hold">
+                                        <p:cTn id="32" dur="1" fill="hold">
                                           <p:stCondLst>
                                             <p:cond delay="0"/>
                                           </p:stCondLst>
@@ -13592,26 +14331,71 @@
                     </p:cTn>
                   </p:par>
                   <p:par>
-                    <p:cTn id="31" fill="hold">
+                    <p:cTn id="33" fill="hold">
                       <p:stCondLst>
                         <p:cond delay="indefinite"/>
                       </p:stCondLst>
                       <p:childTnLst>
                         <p:par>
-                          <p:cTn id="32" fill="hold">
+                          <p:cTn id="34" fill="hold">
                             <p:stCondLst>
                               <p:cond delay="0"/>
                             </p:stCondLst>
                             <p:childTnLst>
                               <p:par>
-                                <p:cTn id="33" presetID="1" presetClass="entr" presetSubtype="0" fill="hold" grpId="0" nodeType="clickEffect">
+                                <p:cTn id="35" presetID="1" presetClass="entr" presetSubtype="0" fill="hold" nodeType="clickEffect">
                                   <p:stCondLst>
                                     <p:cond delay="0"/>
                                   </p:stCondLst>
                                   <p:childTnLst>
                                     <p:set>
                                       <p:cBhvr>
-                                        <p:cTn id="34" dur="1" fill="hold">
+                                        <p:cTn id="36" dur="1" fill="hold">
+                                          <p:stCondLst>
+                                            <p:cond delay="0"/>
+                                          </p:stCondLst>
+                                        </p:cTn>
+                                        <p:tgtEl>
+                                          <p:spTgt spid="7"/>
+                                        </p:tgtEl>
+                                        <p:attrNameLst>
+                                          <p:attrName>style.visibility</p:attrName>
+                                        </p:attrNameLst>
+                                      </p:cBhvr>
+                                      <p:to>
+                                        <p:strVal val="visible"/>
+                                      </p:to>
+                                    </p:set>
+                                  </p:childTnLst>
+                                </p:cTn>
+                              </p:par>
+                            </p:childTnLst>
+                          </p:cTn>
+                        </p:par>
+                      </p:childTnLst>
+                    </p:cTn>
+                  </p:par>
+                  <p:par>
+                    <p:cTn id="37" fill="hold">
+                      <p:stCondLst>
+                        <p:cond delay="indefinite"/>
+                      </p:stCondLst>
+                      <p:childTnLst>
+                        <p:par>
+                          <p:cTn id="38" fill="hold">
+                            <p:stCondLst>
+                              <p:cond delay="0"/>
+                            </p:stCondLst>
+                            <p:childTnLst>
+                              <p:par>
+                                <p:cTn id="39" presetID="1" presetClass="entr" presetSubtype="0" fill="hold" grpId="0" nodeType="clickEffect">
+                                  <p:stCondLst>
+                                    <p:cond delay="0"/>
+                                  </p:stCondLst>
+                                  <p:childTnLst>
+                                    <p:set>
+                                      <p:cBhvr>
+                                        <p:cTn id="40" dur="1" fill="hold">
                                           <p:stCondLst>
                                             <p:cond delay="0"/>
                                           </p:stCondLst>
@@ -13637,32 +14421,32 @@
                     </p:cTn>
                   </p:par>
                   <p:par>
-                    <p:cTn id="35" fill="hold">
+                    <p:cTn id="41" fill="hold">
                       <p:stCondLst>
                         <p:cond delay="indefinite"/>
                       </p:stCondLst>
                       <p:childTnLst>
                         <p:par>
-                          <p:cTn id="36" fill="hold">
+                          <p:cTn id="42" fill="hold">
                             <p:stCondLst>
                               <p:cond delay="0"/>
                             </p:stCondLst>
                             <p:childTnLst>
                               <p:par>
-                                <p:cTn id="37" presetID="1" presetClass="entr" presetSubtype="0" fill="hold" grpId="0" nodeType="clickEffect">
+                                <p:cTn id="43" presetID="1" presetClass="entr" presetSubtype="0" fill="hold" grpId="0" nodeType="clickEffect">
                                   <p:stCondLst>
                                     <p:cond delay="0"/>
                                   </p:stCondLst>
                                   <p:childTnLst>
                                     <p:set>
                                       <p:cBhvr>
-                                        <p:cTn id="38" dur="1" fill="hold">
+                                        <p:cTn id="44" dur="1" fill="hold">
                                           <p:stCondLst>
                                             <p:cond delay="0"/>
                                           </p:stCondLst>
                                         </p:cTn>
                                         <p:tgtEl>
-                                          <p:spTgt spid="27"/>
+                                          <p:spTgt spid="9"/>
                                         </p:tgtEl>
                                         <p:attrNameLst>
                                           <p:attrName>style.visibility</p:attrName>
@@ -13704,9 +14488,10 @@
     </p:tnLst>
     <p:bldLst>
       <p:bldP spid="5" grpId="0" animBg="1"/>
-      <p:bldP spid="27" grpId="0" animBg="1"/>
       <p:bldP spid="13" grpId="0" animBg="1"/>
       <p:bldP spid="15" grpId="0" animBg="1"/>
+      <p:bldP spid="3" grpId="0" animBg="1"/>
+      <p:bldP spid="9" grpId="0" animBg="1"/>
     </p:bldLst>
   </p:timing>
 </p:sld>
@@ -14771,10 +15556,10 @@
         </p:nvGrpSpPr>
         <p:grpSpPr>
           <a:xfrm>
-            <a:off x="5938684" y="3481142"/>
-            <a:ext cx="5301730" cy="668832"/>
-            <a:chOff x="5938684" y="3481142"/>
-            <a:chExt cx="5301730" cy="668832"/>
+            <a:off x="5938684" y="3481143"/>
+            <a:ext cx="5301730" cy="668831"/>
+            <a:chOff x="5938684" y="3481143"/>
+            <a:chExt cx="5301730" cy="668831"/>
           </a:xfrm>
         </p:grpSpPr>
         <p:pic>
@@ -14821,8 +15606,8 @@
           </p:nvSpPr>
           <p:spPr>
             <a:xfrm>
-              <a:off x="6428609" y="3481142"/>
-              <a:ext cx="3315159" cy="307777"/>
+              <a:off x="6428609" y="3481143"/>
+              <a:ext cx="4556166" cy="307777"/>
             </a:xfrm>
             <a:prstGeom prst="rect">
               <a:avLst/>
@@ -14858,10 +15643,10 @@
         </p:nvGrpSpPr>
         <p:grpSpPr>
           <a:xfrm>
-            <a:off x="5638800" y="608284"/>
-            <a:ext cx="5601614" cy="1292716"/>
-            <a:chOff x="5638800" y="608284"/>
-            <a:chExt cx="5601614" cy="1292716"/>
+            <a:off x="5638800" y="608285"/>
+            <a:ext cx="5601614" cy="1292715"/>
+            <a:chOff x="5638800" y="608285"/>
+            <a:chExt cx="5601614" cy="1292715"/>
           </a:xfrm>
         </p:grpSpPr>
         <p:grpSp>
@@ -14878,10 +15663,10 @@
           </p:nvGrpSpPr>
           <p:grpSpPr>
             <a:xfrm>
-              <a:off x="5638800" y="608284"/>
-              <a:ext cx="5601614" cy="1292716"/>
-              <a:chOff x="5638800" y="608284"/>
-              <a:chExt cx="5601614" cy="1292716"/>
+              <a:off x="5638800" y="608285"/>
+              <a:ext cx="5601614" cy="1292715"/>
+              <a:chOff x="5638800" y="608285"/>
+              <a:chExt cx="5601614" cy="1292715"/>
             </a:xfrm>
           </p:grpSpPr>
           <p:grpSp>
@@ -14898,10 +15683,10 @@
             </p:nvGrpSpPr>
             <p:grpSpPr>
               <a:xfrm>
-                <a:off x="5638800" y="608284"/>
-                <a:ext cx="5423924" cy="605205"/>
-                <a:chOff x="5638800" y="608284"/>
-                <a:chExt cx="5423924" cy="605205"/>
+                <a:off x="5638800" y="608285"/>
+                <a:ext cx="5423924" cy="605204"/>
+                <a:chOff x="5638800" y="608285"/>
+                <a:chExt cx="5423924" cy="605204"/>
               </a:xfrm>
             </p:grpSpPr>
             <p:pic>
@@ -14948,8 +15733,8 @@
               </p:nvSpPr>
               <p:spPr>
                 <a:xfrm>
-                  <a:off x="5703214" y="608284"/>
-                  <a:ext cx="821989" cy="246221"/>
+                  <a:off x="5703214" y="608285"/>
+                  <a:ext cx="1782467" cy="246221"/>
                 </a:xfrm>
                 <a:prstGeom prst="rect">
                   <a:avLst/>
@@ -14969,7 +15754,7 @@
                 <a:p>
                   <a:r>
                     <a:rPr lang="en-US" sz="1000" dirty="0"/>
-                    <a:t>PR Author</a:t>
+                    <a:t>PR Author / repo maintainer</a:t>
                   </a:r>
                 </a:p>
               </p:txBody>
@@ -15019,8 +15804,8 @@
           </p:nvSpPr>
           <p:spPr>
             <a:xfrm>
-              <a:off x="7222948" y="1057061"/>
-              <a:ext cx="2904278" cy="276999"/>
+              <a:off x="6525203" y="1057061"/>
+              <a:ext cx="3602023" cy="276999"/>
             </a:xfrm>
             <a:prstGeom prst="rect">
               <a:avLst/>
@@ -15269,7 +16054,7 @@
         </p:nvSpPr>
         <p:spPr>
           <a:xfrm>
-            <a:off x="5994419" y="4797638"/>
+            <a:off x="5792061" y="5386515"/>
             <a:ext cx="5068305" cy="830997"/>
           </a:xfrm>
           <a:prstGeom prst="rect">
@@ -15298,6 +16083,36 @@
           </a:p>
         </p:txBody>
       </p:sp>
+      <p:pic>
+        <p:nvPicPr>
+          <p:cNvPr id="8" name="Picture 7">
+            <a:extLst>
+              <a:ext uri="{FF2B5EF4-FFF2-40B4-BE49-F238E27FC236}">
+                <a16:creationId xmlns:a16="http://schemas.microsoft.com/office/drawing/2014/main" id="{0B7E4B15-0E5D-3E52-2710-39C2636DABF8}"/>
+              </a:ext>
+            </a:extLst>
+          </p:cNvPr>
+          <p:cNvPicPr>
+            <a:picLocks noChangeAspect="1"/>
+          </p:cNvPicPr>
+          <p:nvPr/>
+        </p:nvPicPr>
+        <p:blipFill>
+          <a:blip r:embed="rId11"/>
+          <a:stretch>
+            <a:fillRect/>
+          </a:stretch>
+        </p:blipFill>
+        <p:spPr>
+          <a:xfrm>
+            <a:off x="5638800" y="4247271"/>
+            <a:ext cx="6261384" cy="509884"/>
+          </a:xfrm>
+          <a:prstGeom prst="rect">
+            <a:avLst/>
+          </a:prstGeom>
+        </p:spPr>
+      </p:pic>
     </p:spTree>
     <p:extLst>
       <p:ext uri="{BB962C8B-B14F-4D97-AF65-F5344CB8AC3E}">
@@ -15554,7 +16369,7 @@
                             </p:stCondLst>
                             <p:childTnLst>
                               <p:par>
-                                <p:cTn id="25" presetID="1" presetClass="entr" presetSubtype="0" fill="hold" grpId="0" nodeType="clickEffect">
+                                <p:cTn id="25" presetID="1" presetClass="entr" presetSubtype="0" fill="hold" nodeType="clickEffect">
                                   <p:stCondLst>
                                     <p:cond delay="0"/>
                                   </p:stCondLst>
@@ -15567,7 +16382,7 @@
                                           </p:stCondLst>
                                         </p:cTn>
                                         <p:tgtEl>
-                                          <p:spTgt spid="5"/>
+                                          <p:spTgt spid="8"/>
                                         </p:tgtEl>
                                         <p:attrNameLst>
                                           <p:attrName>style.visibility</p:attrName>
@@ -15607,6 +16422,51 @@
                                     <p:set>
                                       <p:cBhvr>
                                         <p:cTn id="30" dur="1" fill="hold">
+                                          <p:stCondLst>
+                                            <p:cond delay="0"/>
+                                          </p:stCondLst>
+                                        </p:cTn>
+                                        <p:tgtEl>
+                                          <p:spTgt spid="5"/>
+                                        </p:tgtEl>
+                                        <p:attrNameLst>
+                                          <p:attrName>style.visibility</p:attrName>
+                                        </p:attrNameLst>
+                                      </p:cBhvr>
+                                      <p:to>
+                                        <p:strVal val="visible"/>
+                                      </p:to>
+                                    </p:set>
+                                  </p:childTnLst>
+                                </p:cTn>
+                              </p:par>
+                            </p:childTnLst>
+                          </p:cTn>
+                        </p:par>
+                      </p:childTnLst>
+                    </p:cTn>
+                  </p:par>
+                  <p:par>
+                    <p:cTn id="31" fill="hold">
+                      <p:stCondLst>
+                        <p:cond delay="indefinite"/>
+                      </p:stCondLst>
+                      <p:childTnLst>
+                        <p:par>
+                          <p:cTn id="32" fill="hold">
+                            <p:stCondLst>
+                              <p:cond delay="0"/>
+                            </p:stCondLst>
+                            <p:childTnLst>
+                              <p:par>
+                                <p:cTn id="33" presetID="1" presetClass="entr" presetSubtype="0" fill="hold" grpId="0" nodeType="clickEffect">
+                                  <p:stCondLst>
+                                    <p:cond delay="0"/>
+                                  </p:stCondLst>
+                                  <p:childTnLst>
+                                    <p:set>
+                                      <p:cBhvr>
+                                        <p:cTn id="34" dur="1" fill="hold">
                                           <p:stCondLst>
                                             <p:cond delay="0"/>
                                           </p:stCondLst>
@@ -16051,7 +16911,7 @@
         </p:nvSpPr>
         <p:spPr>
           <a:xfrm>
-            <a:off x="4999387" y="4625823"/>
+            <a:off x="5035606" y="4977468"/>
             <a:ext cx="6096000" cy="830997"/>
           </a:xfrm>
           <a:prstGeom prst="rect">
@@ -18901,8 +19761,8 @@
         </p:nvSpPr>
         <p:spPr>
           <a:xfrm>
-            <a:off x="381000" y="1085458"/>
-            <a:ext cx="3596414" cy="707886"/>
+            <a:off x="380999" y="1085458"/>
+            <a:ext cx="3862872" cy="646331"/>
           </a:xfrm>
           <a:prstGeom prst="rect">
             <a:avLst/>
@@ -18924,11 +19784,11 @@
               <a:buNone/>
             </a:pPr>
             <a:r>
-              <a:rPr lang="en-GB" sz="2000" dirty="0">
+              <a:rPr lang="en-GB" dirty="0">
                 <a:latin typeface="Arial" panose="020B0604020202020204" pitchFamily="34" charset="0"/>
                 <a:cs typeface="Arial" panose="020B0604020202020204" pitchFamily="34" charset="0"/>
               </a:rPr>
-              <a:t>Architectural Misalignment — Local Fix vs. Design Invariant</a:t>
+              <a:t>Architectural Misalignment — Local Fix vs. Architectural Consistency</a:t>
             </a:r>
           </a:p>
         </p:txBody>
@@ -19386,6 +20246,1815 @@
     <p:bldLst>
       <p:bldP spid="45" grpId="0" animBg="1"/>
       <p:bldP spid="47" grpId="0" animBg="1"/>
+    </p:bldLst>
+  </p:timing>
+</p:sld>
+</file>
+
+<file path=ppt/slides/slide21.xml><?xml version="1.0" encoding="utf-8"?>
+<p:sld xmlns:a="http://schemas.openxmlformats.org/drawingml/2006/main" xmlns:r="http://schemas.openxmlformats.org/officeDocument/2006/relationships" xmlns:p="http://schemas.openxmlformats.org/presentationml/2006/main">
+  <p:cSld>
+    <p:spTree>
+      <p:nvGrpSpPr>
+        <p:cNvPr id="1" name="">
+          <a:extLst>
+            <a:ext uri="{FF2B5EF4-FFF2-40B4-BE49-F238E27FC236}">
+              <a16:creationId xmlns:a16="http://schemas.microsoft.com/office/drawing/2014/main" id="{E0718BB4-37BC-C5FB-E2E2-A14D0614A90E}"/>
+            </a:ext>
+          </a:extLst>
+        </p:cNvPr>
+        <p:cNvGrpSpPr/>
+        <p:nvPr/>
+      </p:nvGrpSpPr>
+      <p:grpSpPr>
+        <a:xfrm>
+          <a:off x="0" y="0"/>
+          <a:ext cx="0" cy="0"/>
+          <a:chOff x="0" y="0"/>
+          <a:chExt cx="0" cy="0"/>
+        </a:xfrm>
+      </p:grpSpPr>
+      <p:sp>
+        <p:nvSpPr>
+          <p:cNvPr id="2" name="Title 1">
+            <a:extLst>
+              <a:ext uri="{FF2B5EF4-FFF2-40B4-BE49-F238E27FC236}">
+                <a16:creationId xmlns:a16="http://schemas.microsoft.com/office/drawing/2014/main" id="{79B72EAD-9B06-0EBD-1841-21409946992E}"/>
+              </a:ext>
+            </a:extLst>
+          </p:cNvPr>
+          <p:cNvSpPr>
+            <a:spLocks noGrp="1"/>
+          </p:cNvSpPr>
+          <p:nvPr>
+            <p:ph type="title"/>
+          </p:nvPr>
+        </p:nvSpPr>
+        <p:spPr>
+          <a:xfrm>
+            <a:off x="381000" y="150813"/>
+            <a:ext cx="10515600" cy="620713"/>
+          </a:xfrm>
+        </p:spPr>
+        <p:txBody>
+          <a:bodyPr>
+            <a:normAutofit fontScale="90000"/>
+          </a:bodyPr>
+          <a:lstStyle/>
+          <a:p>
+            <a:r>
+              <a:rPr lang="en-GB" dirty="0"/>
+              <a:t>AI in PR Workflows — Four Distinct Roles</a:t>
+            </a:r>
+            <a:endParaRPr lang="en-US" dirty="0"/>
+          </a:p>
+        </p:txBody>
+      </p:sp>
+      <p:cxnSp>
+        <p:nvCxnSpPr>
+          <p:cNvPr id="5" name="Straight Connector 4">
+            <a:extLst>
+              <a:ext uri="{FF2B5EF4-FFF2-40B4-BE49-F238E27FC236}">
+                <a16:creationId xmlns:a16="http://schemas.microsoft.com/office/drawing/2014/main" id="{59B4CDCD-817A-E1DF-E4F7-7E84F33D03D8}"/>
+              </a:ext>
+            </a:extLst>
+          </p:cNvPr>
+          <p:cNvCxnSpPr/>
+          <p:nvPr/>
+        </p:nvCxnSpPr>
+        <p:spPr>
+          <a:xfrm>
+            <a:off x="6065004" y="867909"/>
+            <a:ext cx="0" cy="2836190"/>
+          </a:xfrm>
+          <a:prstGeom prst="line">
+            <a:avLst/>
+          </a:prstGeom>
+          <a:ln w="28575">
+            <a:solidFill>
+              <a:schemeClr val="tx1"/>
+            </a:solidFill>
+          </a:ln>
+        </p:spPr>
+        <p:style>
+          <a:lnRef idx="2">
+            <a:schemeClr val="accent1"/>
+          </a:lnRef>
+          <a:fillRef idx="0">
+            <a:schemeClr val="accent1"/>
+          </a:fillRef>
+          <a:effectRef idx="1">
+            <a:schemeClr val="accent1"/>
+          </a:effectRef>
+          <a:fontRef idx="minor">
+            <a:schemeClr val="tx1"/>
+          </a:fontRef>
+        </p:style>
+      </p:cxnSp>
+      <p:sp>
+        <p:nvSpPr>
+          <p:cNvPr id="7" name="TextBox 6">
+            <a:extLst>
+              <a:ext uri="{FF2B5EF4-FFF2-40B4-BE49-F238E27FC236}">
+                <a16:creationId xmlns:a16="http://schemas.microsoft.com/office/drawing/2014/main" id="{187BEB86-417A-1B78-9D56-61650FAFB7B5}"/>
+              </a:ext>
+            </a:extLst>
+          </p:cNvPr>
+          <p:cNvSpPr txBox="1"/>
+          <p:nvPr/>
+        </p:nvSpPr>
+        <p:spPr>
+          <a:xfrm>
+            <a:off x="135609" y="1069383"/>
+            <a:ext cx="5815740" cy="923330"/>
+          </a:xfrm>
+          <a:prstGeom prst="rect">
+            <a:avLst/>
+          </a:prstGeom>
+          <a:noFill/>
+        </p:spPr>
+        <p:txBody>
+          <a:bodyPr wrap="square">
+            <a:spAutoFit/>
+          </a:bodyPr>
+          <a:lstStyle/>
+          <a:p>
+            <a:pPr>
+              <a:buNone/>
+            </a:pPr>
+            <a:r>
+              <a:rPr lang="en-BE" b="1" dirty="0">
+                <a:latin typeface="Arial" panose="020B0604020202020204" pitchFamily="34" charset="0"/>
+                <a:cs typeface="Arial" panose="020B0604020202020204" pitchFamily="34" charset="0"/>
+              </a:rPr>
+              <a:t>🟢 </a:t>
+            </a:r>
+            <a:r>
+              <a:rPr lang="en-GB" b="1" dirty="0">
+                <a:latin typeface="Arial" panose="020B0604020202020204" pitchFamily="34" charset="0"/>
+                <a:cs typeface="Arial" panose="020B0604020202020204" pitchFamily="34" charset="0"/>
+              </a:rPr>
+              <a:t>PA — Code contributor</a:t>
+            </a:r>
+          </a:p>
+          <a:p>
+            <a:pPr marL="285750" indent="-285750">
+              <a:buFont typeface="Arial" panose="020B0604020202020204" pitchFamily="34" charset="0"/>
+              <a:buChar char="•"/>
+            </a:pPr>
+            <a:r>
+              <a:rPr lang="en-GB" dirty="0">
+                <a:latin typeface="Arial" panose="020B0604020202020204" pitchFamily="34" charset="0"/>
+                <a:cs typeface="Arial" panose="020B0604020202020204" pitchFamily="34" charset="0"/>
+              </a:rPr>
+              <a:t>AI-generated code integrated (verbatim or adapted).</a:t>
+            </a:r>
+          </a:p>
+          <a:p>
+            <a:pPr marL="285750" indent="-285750">
+              <a:buFont typeface="Arial" panose="020B0604020202020204" pitchFamily="34" charset="0"/>
+              <a:buChar char="•"/>
+            </a:pPr>
+            <a:r>
+              <a:rPr lang="en-GB" dirty="0">
+                <a:latin typeface="Arial" panose="020B0604020202020204" pitchFamily="34" charset="0"/>
+                <a:cs typeface="Arial" panose="020B0604020202020204" pitchFamily="34" charset="0"/>
+              </a:rPr>
+              <a:t>AI directly contributes executable code.</a:t>
+            </a:r>
+          </a:p>
+        </p:txBody>
+      </p:sp>
+      <p:sp>
+        <p:nvSpPr>
+          <p:cNvPr id="9" name="TextBox 8">
+            <a:extLst>
+              <a:ext uri="{FF2B5EF4-FFF2-40B4-BE49-F238E27FC236}">
+                <a16:creationId xmlns:a16="http://schemas.microsoft.com/office/drawing/2014/main" id="{7C8B26A0-67E2-FEE2-2687-41F041A8DB9A}"/>
+              </a:ext>
+            </a:extLst>
+          </p:cNvPr>
+          <p:cNvSpPr txBox="1"/>
+          <p:nvPr/>
+        </p:nvSpPr>
+        <p:spPr>
+          <a:xfrm>
+            <a:off x="135608" y="2321567"/>
+            <a:ext cx="5929395" cy="1200329"/>
+          </a:xfrm>
+          <a:prstGeom prst="rect">
+            <a:avLst/>
+          </a:prstGeom>
+          <a:noFill/>
+        </p:spPr>
+        <p:txBody>
+          <a:bodyPr wrap="square">
+            <a:spAutoFit/>
+          </a:bodyPr>
+          <a:lstStyle/>
+          <a:p>
+            <a:pPr>
+              <a:buNone/>
+            </a:pPr>
+            <a:r>
+              <a:rPr lang="en-BE" b="1" dirty="0"/>
+              <a:t>🟡 </a:t>
+            </a:r>
+            <a:r>
+              <a:rPr lang="en-GB" b="1" dirty="0">
+                <a:latin typeface="Arial" panose="020B0604020202020204" pitchFamily="34" charset="0"/>
+                <a:cs typeface="Arial" panose="020B0604020202020204" pitchFamily="34" charset="0"/>
+              </a:rPr>
+              <a:t>PN — Conceptual advisor</a:t>
+            </a:r>
+          </a:p>
+          <a:p>
+            <a:pPr marL="285750" indent="-285750">
+              <a:buFont typeface="Arial" panose="020B0604020202020204" pitchFamily="34" charset="0"/>
+              <a:buChar char="•"/>
+            </a:pPr>
+            <a:r>
+              <a:rPr lang="en-GB" dirty="0">
+                <a:latin typeface="Arial" panose="020B0604020202020204" pitchFamily="34" charset="0"/>
+                <a:cs typeface="Arial" panose="020B0604020202020204" pitchFamily="34" charset="0"/>
+              </a:rPr>
+              <a:t>AI suggestion influences reasoning, but code is reworked.</a:t>
+            </a:r>
+          </a:p>
+          <a:p>
+            <a:pPr marL="285750" indent="-285750">
+              <a:buFont typeface="Arial" panose="020B0604020202020204" pitchFamily="34" charset="0"/>
+              <a:buChar char="•"/>
+            </a:pPr>
+            <a:r>
+              <a:rPr lang="en-GB" dirty="0">
+                <a:latin typeface="Arial" panose="020B0604020202020204" pitchFamily="34" charset="0"/>
+                <a:cs typeface="Arial" panose="020B0604020202020204" pitchFamily="34" charset="0"/>
+              </a:rPr>
+              <a:t>Conceptual influence without structural preservation.</a:t>
+            </a:r>
+          </a:p>
+        </p:txBody>
+      </p:sp>
+      <p:sp>
+        <p:nvSpPr>
+          <p:cNvPr id="14" name="TextBox 13">
+            <a:extLst>
+              <a:ext uri="{FF2B5EF4-FFF2-40B4-BE49-F238E27FC236}">
+                <a16:creationId xmlns:a16="http://schemas.microsoft.com/office/drawing/2014/main" id="{34B156F1-3120-B304-6E00-47F26AF3DAE5}"/>
+              </a:ext>
+            </a:extLst>
+          </p:cNvPr>
+          <p:cNvSpPr txBox="1"/>
+          <p:nvPr/>
+        </p:nvSpPr>
+        <p:spPr>
+          <a:xfrm>
+            <a:off x="6178660" y="946382"/>
+            <a:ext cx="6098582" cy="1200329"/>
+          </a:xfrm>
+          <a:prstGeom prst="rect">
+            <a:avLst/>
+          </a:prstGeom>
+          <a:noFill/>
+        </p:spPr>
+        <p:txBody>
+          <a:bodyPr wrap="square">
+            <a:spAutoFit/>
+          </a:bodyPr>
+          <a:lstStyle/>
+          <a:p>
+            <a:pPr>
+              <a:buNone/>
+            </a:pPr>
+            <a:r>
+              <a:rPr lang="en-BE" b="1" dirty="0"/>
+              <a:t>🔵 </a:t>
+            </a:r>
+            <a:r>
+              <a:rPr lang="en-GB" b="1" dirty="0">
+                <a:latin typeface="Arial" panose="020B0604020202020204" pitchFamily="34" charset="0"/>
+                <a:cs typeface="Arial" panose="020B0604020202020204" pitchFamily="34" charset="0"/>
+              </a:rPr>
+              <a:t>NE — Educational clarifier</a:t>
+            </a:r>
+          </a:p>
+          <a:p>
+            <a:pPr marL="285750" indent="-285750">
+              <a:buFont typeface="Arial" panose="020B0604020202020204" pitchFamily="34" charset="0"/>
+              <a:buChar char="•"/>
+            </a:pPr>
+            <a:r>
+              <a:rPr lang="en-GB" dirty="0">
+                <a:latin typeface="Arial" panose="020B0604020202020204" pitchFamily="34" charset="0"/>
+                <a:cs typeface="Arial" panose="020B0604020202020204" pitchFamily="34" charset="0"/>
+              </a:rPr>
+              <a:t>AI provides clarification, explanation, or system understanding.</a:t>
+            </a:r>
+          </a:p>
+          <a:p>
+            <a:pPr marL="285750" indent="-285750">
+              <a:buFont typeface="Arial" panose="020B0604020202020204" pitchFamily="34" charset="0"/>
+              <a:buChar char="•"/>
+            </a:pPr>
+            <a:r>
+              <a:rPr lang="en-GB" dirty="0">
+                <a:latin typeface="Arial" panose="020B0604020202020204" pitchFamily="34" charset="0"/>
+                <a:cs typeface="Arial" panose="020B0604020202020204" pitchFamily="34" charset="0"/>
+              </a:rPr>
+              <a:t>AI supports learning without producing a patch.</a:t>
+            </a:r>
+          </a:p>
+        </p:txBody>
+      </p:sp>
+      <p:sp>
+        <p:nvSpPr>
+          <p:cNvPr id="19" name="TextBox 18">
+            <a:extLst>
+              <a:ext uri="{FF2B5EF4-FFF2-40B4-BE49-F238E27FC236}">
+                <a16:creationId xmlns:a16="http://schemas.microsoft.com/office/drawing/2014/main" id="{61F0977A-D5BB-B457-05D1-E9416ED0BD3E}"/>
+              </a:ext>
+            </a:extLst>
+          </p:cNvPr>
+          <p:cNvSpPr txBox="1"/>
+          <p:nvPr/>
+        </p:nvSpPr>
+        <p:spPr>
+          <a:xfrm>
+            <a:off x="6292313" y="2513720"/>
+            <a:ext cx="6137328" cy="1200329"/>
+          </a:xfrm>
+          <a:prstGeom prst="rect">
+            <a:avLst/>
+          </a:prstGeom>
+          <a:noFill/>
+        </p:spPr>
+        <p:txBody>
+          <a:bodyPr wrap="square">
+            <a:spAutoFit/>
+          </a:bodyPr>
+          <a:lstStyle/>
+          <a:p>
+            <a:pPr>
+              <a:buNone/>
+            </a:pPr>
+            <a:r>
+              <a:rPr lang="en-BE" b="1" dirty="0"/>
+              <a:t>🔴 </a:t>
+            </a:r>
+            <a:r>
+              <a:rPr lang="en-GB" b="1" dirty="0">
+                <a:latin typeface="Arial" panose="020B0604020202020204" pitchFamily="34" charset="0"/>
+                <a:cs typeface="Arial" panose="020B0604020202020204" pitchFamily="34" charset="0"/>
+              </a:rPr>
+              <a:t>CL — Architectural catalyst</a:t>
+            </a:r>
+          </a:p>
+          <a:p>
+            <a:pPr marL="285750" indent="-285750">
+              <a:buFont typeface="Arial" panose="020B0604020202020204" pitchFamily="34" charset="0"/>
+              <a:buChar char="•"/>
+            </a:pPr>
+            <a:r>
+              <a:rPr lang="en-GB" dirty="0">
+                <a:latin typeface="Arial" panose="020B0604020202020204" pitchFamily="34" charset="0"/>
+                <a:cs typeface="Arial" panose="020B0604020202020204" pitchFamily="34" charset="0"/>
+              </a:rPr>
+              <a:t>AI-informed review surfaces deeper architectural issues.</a:t>
+            </a:r>
+          </a:p>
+          <a:p>
+            <a:pPr marL="285750" indent="-285750">
+              <a:buFont typeface="Arial" panose="020B0604020202020204" pitchFamily="34" charset="0"/>
+              <a:buChar char="•"/>
+            </a:pPr>
+            <a:r>
+              <a:rPr lang="en-GB" dirty="0">
+                <a:latin typeface="Arial" panose="020B0604020202020204" pitchFamily="34" charset="0"/>
+                <a:cs typeface="Arial" panose="020B0604020202020204" pitchFamily="34" charset="0"/>
+              </a:rPr>
+              <a:t>AI clarifies invariants; structural fix not implemented.</a:t>
+            </a:r>
+          </a:p>
+        </p:txBody>
+      </p:sp>
+      <p:sp>
+        <p:nvSpPr>
+          <p:cNvPr id="21" name="TextBox 20">
+            <a:extLst>
+              <a:ext uri="{FF2B5EF4-FFF2-40B4-BE49-F238E27FC236}">
+                <a16:creationId xmlns:a16="http://schemas.microsoft.com/office/drawing/2014/main" id="{A412562E-2ACE-47CD-B4DD-C7CE5B86F412}"/>
+              </a:ext>
+            </a:extLst>
+          </p:cNvPr>
+          <p:cNvSpPr txBox="1"/>
+          <p:nvPr/>
+        </p:nvSpPr>
+        <p:spPr>
+          <a:xfrm>
+            <a:off x="1369017" y="3696752"/>
+            <a:ext cx="9650274" cy="1938992"/>
+          </a:xfrm>
+          <a:prstGeom prst="rect">
+            <a:avLst/>
+          </a:prstGeom>
+          <a:noFill/>
+          <a:ln w="28575">
+            <a:solidFill>
+              <a:schemeClr val="accent3"/>
+            </a:solidFill>
+          </a:ln>
+        </p:spPr>
+        <p:txBody>
+          <a:bodyPr wrap="square" rtlCol="0">
+            <a:spAutoFit/>
+          </a:bodyPr>
+          <a:lstStyle/>
+          <a:p>
+            <a:pPr marL="285750" indent="-285750">
+              <a:buFont typeface="Arial" panose="020B0604020202020204" pitchFamily="34" charset="0"/>
+              <a:buChar char="•"/>
+            </a:pPr>
+            <a:r>
+              <a:rPr lang="en-GB" sz="2400" dirty="0">
+                <a:latin typeface="Arial" panose="020B0604020202020204" pitchFamily="34" charset="0"/>
+                <a:cs typeface="Arial" panose="020B0604020202020204" pitchFamily="34" charset="0"/>
+              </a:rPr>
+              <a:t>AI participation extends beyond patch production.</a:t>
+            </a:r>
+          </a:p>
+          <a:p>
+            <a:pPr marL="285750" indent="-285750">
+              <a:buFont typeface="Arial" panose="020B0604020202020204" pitchFamily="34" charset="0"/>
+              <a:buChar char="•"/>
+            </a:pPr>
+            <a:r>
+              <a:rPr lang="en-GB" sz="2400" dirty="0">
+                <a:latin typeface="Arial" panose="020B0604020202020204" pitchFamily="34" charset="0"/>
+                <a:cs typeface="Arial" panose="020B0604020202020204" pitchFamily="34" charset="0"/>
+              </a:rPr>
+              <a:t>Both authors and reviewers initiate AI use.</a:t>
+            </a:r>
+          </a:p>
+          <a:p>
+            <a:pPr marL="285750" indent="-285750">
+              <a:buFont typeface="Arial" panose="020B0604020202020204" pitchFamily="34" charset="0"/>
+              <a:buChar char="•"/>
+            </a:pPr>
+            <a:r>
+              <a:rPr lang="en-GB" sz="2400" dirty="0">
+                <a:latin typeface="Arial" panose="020B0604020202020204" pitchFamily="34" charset="0"/>
+                <a:cs typeface="Arial" panose="020B0604020202020204" pitchFamily="34" charset="0"/>
+              </a:rPr>
+              <a:t>Professional judgment mediates AI integration.</a:t>
+            </a:r>
+          </a:p>
+          <a:p>
+            <a:pPr marL="285750" indent="-285750">
+              <a:buFont typeface="Arial" panose="020B0604020202020204" pitchFamily="34" charset="0"/>
+              <a:buChar char="•"/>
+            </a:pPr>
+            <a:r>
+              <a:rPr lang="en-GB" sz="2400" dirty="0">
+                <a:latin typeface="Arial" panose="020B0604020202020204" pitchFamily="34" charset="0"/>
+                <a:cs typeface="Arial" panose="020B0604020202020204" pitchFamily="34" charset="0"/>
+              </a:rPr>
+              <a:t>Technical validity does not guarantee integration.</a:t>
+            </a:r>
+          </a:p>
+          <a:p>
+            <a:pPr marL="285750" indent="-285750">
+              <a:buFont typeface="Arial" panose="020B0604020202020204" pitchFamily="34" charset="0"/>
+              <a:buChar char="•"/>
+            </a:pPr>
+            <a:r>
+              <a:rPr lang="en-GB" sz="2400" dirty="0">
+                <a:latin typeface="Arial" panose="020B0604020202020204" pitchFamily="34" charset="0"/>
+                <a:cs typeface="Arial" panose="020B0604020202020204" pitchFamily="34" charset="0"/>
+              </a:rPr>
+              <a:t>AI can elevate review quality — even when patches aren’t adopted.</a:t>
+            </a:r>
+          </a:p>
+        </p:txBody>
+      </p:sp>
+      <p:sp>
+        <p:nvSpPr>
+          <p:cNvPr id="28" name="TextBox 27">
+            <a:extLst>
+              <a:ext uri="{FF2B5EF4-FFF2-40B4-BE49-F238E27FC236}">
+                <a16:creationId xmlns:a16="http://schemas.microsoft.com/office/drawing/2014/main" id="{3AB394E3-A2F0-BDE5-E0F0-33DC1DD19DB4}"/>
+              </a:ext>
+            </a:extLst>
+          </p:cNvPr>
+          <p:cNvSpPr txBox="1"/>
+          <p:nvPr/>
+        </p:nvSpPr>
+        <p:spPr>
+          <a:xfrm>
+            <a:off x="1369017" y="5810600"/>
+            <a:ext cx="9391970" cy="830997"/>
+          </a:xfrm>
+          <a:prstGeom prst="rect">
+            <a:avLst/>
+          </a:prstGeom>
+          <a:noFill/>
+          <a:ln w="28575">
+            <a:solidFill>
+              <a:srgbClr val="0432FF"/>
+            </a:solidFill>
+          </a:ln>
+        </p:spPr>
+        <p:txBody>
+          <a:bodyPr wrap="square">
+            <a:spAutoFit/>
+          </a:bodyPr>
+          <a:lstStyle/>
+          <a:p>
+            <a:pPr>
+              <a:buNone/>
+            </a:pPr>
+            <a:r>
+              <a:rPr lang="en-GB" sz="2400" dirty="0">
+                <a:latin typeface="Arial" panose="020B0604020202020204" pitchFamily="34" charset="0"/>
+                <a:cs typeface="Arial" panose="020B0604020202020204" pitchFamily="34" charset="0"/>
+              </a:rPr>
+              <a:t>AI enters PR workflows as a collaborative reasoning partner, but integration is governed by architectural discipline.</a:t>
+            </a:r>
+          </a:p>
+        </p:txBody>
+      </p:sp>
+    </p:spTree>
+    <p:extLst>
+      <p:ext uri="{BB962C8B-B14F-4D97-AF65-F5344CB8AC3E}">
+        <p14:creationId xmlns:p14="http://schemas.microsoft.com/office/powerpoint/2010/main" val="2588183550"/>
+      </p:ext>
+    </p:extLst>
+  </p:cSld>
+  <p:clrMapOvr>
+    <a:masterClrMapping/>
+  </p:clrMapOvr>
+  <p:timing>
+    <p:tnLst>
+      <p:par>
+        <p:cTn id="1" dur="indefinite" restart="never" nodeType="tmRoot">
+          <p:childTnLst>
+            <p:seq concurrent="1" nextAc="seek">
+              <p:cTn id="2" dur="indefinite" nodeType="mainSeq">
+                <p:childTnLst>
+                  <p:par>
+                    <p:cTn id="3" fill="hold">
+                      <p:stCondLst>
+                        <p:cond delay="indefinite"/>
+                      </p:stCondLst>
+                      <p:childTnLst>
+                        <p:par>
+                          <p:cTn id="4" fill="hold">
+                            <p:stCondLst>
+                              <p:cond delay="0"/>
+                            </p:stCondLst>
+                            <p:childTnLst>
+                              <p:par>
+                                <p:cTn id="5" presetID="1" presetClass="entr" presetSubtype="0" fill="hold" grpId="0" nodeType="clickEffect">
+                                  <p:stCondLst>
+                                    <p:cond delay="0"/>
+                                  </p:stCondLst>
+                                  <p:childTnLst>
+                                    <p:set>
+                                      <p:cBhvr>
+                                        <p:cTn id="6" dur="1" fill="hold">
+                                          <p:stCondLst>
+                                            <p:cond delay="0"/>
+                                          </p:stCondLst>
+                                        </p:cTn>
+                                        <p:tgtEl>
+                                          <p:spTgt spid="7"/>
+                                        </p:tgtEl>
+                                        <p:attrNameLst>
+                                          <p:attrName>style.visibility</p:attrName>
+                                        </p:attrNameLst>
+                                      </p:cBhvr>
+                                      <p:to>
+                                        <p:strVal val="visible"/>
+                                      </p:to>
+                                    </p:set>
+                                  </p:childTnLst>
+                                </p:cTn>
+                              </p:par>
+                            </p:childTnLst>
+                          </p:cTn>
+                        </p:par>
+                      </p:childTnLst>
+                    </p:cTn>
+                  </p:par>
+                  <p:par>
+                    <p:cTn id="7" fill="hold">
+                      <p:stCondLst>
+                        <p:cond delay="indefinite"/>
+                      </p:stCondLst>
+                      <p:childTnLst>
+                        <p:par>
+                          <p:cTn id="8" fill="hold">
+                            <p:stCondLst>
+                              <p:cond delay="0"/>
+                            </p:stCondLst>
+                            <p:childTnLst>
+                              <p:par>
+                                <p:cTn id="9" presetID="1" presetClass="entr" presetSubtype="0" fill="hold" grpId="0" nodeType="clickEffect">
+                                  <p:stCondLst>
+                                    <p:cond delay="0"/>
+                                  </p:stCondLst>
+                                  <p:childTnLst>
+                                    <p:set>
+                                      <p:cBhvr>
+                                        <p:cTn id="10" dur="1" fill="hold">
+                                          <p:stCondLst>
+                                            <p:cond delay="0"/>
+                                          </p:stCondLst>
+                                        </p:cTn>
+                                        <p:tgtEl>
+                                          <p:spTgt spid="9"/>
+                                        </p:tgtEl>
+                                        <p:attrNameLst>
+                                          <p:attrName>style.visibility</p:attrName>
+                                        </p:attrNameLst>
+                                      </p:cBhvr>
+                                      <p:to>
+                                        <p:strVal val="visible"/>
+                                      </p:to>
+                                    </p:set>
+                                  </p:childTnLst>
+                                </p:cTn>
+                              </p:par>
+                            </p:childTnLst>
+                          </p:cTn>
+                        </p:par>
+                      </p:childTnLst>
+                    </p:cTn>
+                  </p:par>
+                  <p:par>
+                    <p:cTn id="11" fill="hold">
+                      <p:stCondLst>
+                        <p:cond delay="indefinite"/>
+                      </p:stCondLst>
+                      <p:childTnLst>
+                        <p:par>
+                          <p:cTn id="12" fill="hold">
+                            <p:stCondLst>
+                              <p:cond delay="0"/>
+                            </p:stCondLst>
+                            <p:childTnLst>
+                              <p:par>
+                                <p:cTn id="13" presetID="1" presetClass="entr" presetSubtype="0" fill="hold" grpId="0" nodeType="clickEffect">
+                                  <p:stCondLst>
+                                    <p:cond delay="0"/>
+                                  </p:stCondLst>
+                                  <p:childTnLst>
+                                    <p:set>
+                                      <p:cBhvr>
+                                        <p:cTn id="14" dur="1" fill="hold">
+                                          <p:stCondLst>
+                                            <p:cond delay="0"/>
+                                          </p:stCondLst>
+                                        </p:cTn>
+                                        <p:tgtEl>
+                                          <p:spTgt spid="14"/>
+                                        </p:tgtEl>
+                                        <p:attrNameLst>
+                                          <p:attrName>style.visibility</p:attrName>
+                                        </p:attrNameLst>
+                                      </p:cBhvr>
+                                      <p:to>
+                                        <p:strVal val="visible"/>
+                                      </p:to>
+                                    </p:set>
+                                  </p:childTnLst>
+                                </p:cTn>
+                              </p:par>
+                              <p:par>
+                                <p:cTn id="15" presetID="1" presetClass="entr" presetSubtype="0" fill="hold" nodeType="withEffect">
+                                  <p:stCondLst>
+                                    <p:cond delay="0"/>
+                                  </p:stCondLst>
+                                  <p:childTnLst>
+                                    <p:set>
+                                      <p:cBhvr>
+                                        <p:cTn id="16" dur="1" fill="hold">
+                                          <p:stCondLst>
+                                            <p:cond delay="0"/>
+                                          </p:stCondLst>
+                                        </p:cTn>
+                                        <p:tgtEl>
+                                          <p:spTgt spid="5"/>
+                                        </p:tgtEl>
+                                        <p:attrNameLst>
+                                          <p:attrName>style.visibility</p:attrName>
+                                        </p:attrNameLst>
+                                      </p:cBhvr>
+                                      <p:to>
+                                        <p:strVal val="visible"/>
+                                      </p:to>
+                                    </p:set>
+                                  </p:childTnLst>
+                                </p:cTn>
+                              </p:par>
+                            </p:childTnLst>
+                          </p:cTn>
+                        </p:par>
+                      </p:childTnLst>
+                    </p:cTn>
+                  </p:par>
+                  <p:par>
+                    <p:cTn id="17" fill="hold">
+                      <p:stCondLst>
+                        <p:cond delay="indefinite"/>
+                      </p:stCondLst>
+                      <p:childTnLst>
+                        <p:par>
+                          <p:cTn id="18" fill="hold">
+                            <p:stCondLst>
+                              <p:cond delay="0"/>
+                            </p:stCondLst>
+                            <p:childTnLst>
+                              <p:par>
+                                <p:cTn id="19" presetID="1" presetClass="entr" presetSubtype="0" fill="hold" grpId="0" nodeType="clickEffect">
+                                  <p:stCondLst>
+                                    <p:cond delay="0"/>
+                                  </p:stCondLst>
+                                  <p:childTnLst>
+                                    <p:set>
+                                      <p:cBhvr>
+                                        <p:cTn id="20" dur="1" fill="hold">
+                                          <p:stCondLst>
+                                            <p:cond delay="0"/>
+                                          </p:stCondLst>
+                                        </p:cTn>
+                                        <p:tgtEl>
+                                          <p:spTgt spid="19"/>
+                                        </p:tgtEl>
+                                        <p:attrNameLst>
+                                          <p:attrName>style.visibility</p:attrName>
+                                        </p:attrNameLst>
+                                      </p:cBhvr>
+                                      <p:to>
+                                        <p:strVal val="visible"/>
+                                      </p:to>
+                                    </p:set>
+                                  </p:childTnLst>
+                                </p:cTn>
+                              </p:par>
+                            </p:childTnLst>
+                          </p:cTn>
+                        </p:par>
+                      </p:childTnLst>
+                    </p:cTn>
+                  </p:par>
+                  <p:par>
+                    <p:cTn id="21" fill="hold">
+                      <p:stCondLst>
+                        <p:cond delay="indefinite"/>
+                      </p:stCondLst>
+                      <p:childTnLst>
+                        <p:par>
+                          <p:cTn id="22" fill="hold">
+                            <p:stCondLst>
+                              <p:cond delay="0"/>
+                            </p:stCondLst>
+                            <p:childTnLst>
+                              <p:par>
+                                <p:cTn id="23" presetID="1" presetClass="entr" presetSubtype="0" fill="hold" grpId="0" nodeType="clickEffect">
+                                  <p:stCondLst>
+                                    <p:cond delay="0"/>
+                                  </p:stCondLst>
+                                  <p:childTnLst>
+                                    <p:set>
+                                      <p:cBhvr>
+                                        <p:cTn id="24" dur="1" fill="hold">
+                                          <p:stCondLst>
+                                            <p:cond delay="0"/>
+                                          </p:stCondLst>
+                                        </p:cTn>
+                                        <p:tgtEl>
+                                          <p:spTgt spid="21"/>
+                                        </p:tgtEl>
+                                        <p:attrNameLst>
+                                          <p:attrName>style.visibility</p:attrName>
+                                        </p:attrNameLst>
+                                      </p:cBhvr>
+                                      <p:to>
+                                        <p:strVal val="visible"/>
+                                      </p:to>
+                                    </p:set>
+                                  </p:childTnLst>
+                                </p:cTn>
+                              </p:par>
+                            </p:childTnLst>
+                          </p:cTn>
+                        </p:par>
+                      </p:childTnLst>
+                    </p:cTn>
+                  </p:par>
+                  <p:par>
+                    <p:cTn id="25" fill="hold">
+                      <p:stCondLst>
+                        <p:cond delay="indefinite"/>
+                      </p:stCondLst>
+                      <p:childTnLst>
+                        <p:par>
+                          <p:cTn id="26" fill="hold">
+                            <p:stCondLst>
+                              <p:cond delay="0"/>
+                            </p:stCondLst>
+                            <p:childTnLst>
+                              <p:par>
+                                <p:cTn id="27" presetID="1" presetClass="entr" presetSubtype="0" fill="hold" grpId="0" nodeType="clickEffect">
+                                  <p:stCondLst>
+                                    <p:cond delay="0"/>
+                                  </p:stCondLst>
+                                  <p:childTnLst>
+                                    <p:set>
+                                      <p:cBhvr>
+                                        <p:cTn id="28" dur="1" fill="hold">
+                                          <p:stCondLst>
+                                            <p:cond delay="0"/>
+                                          </p:stCondLst>
+                                        </p:cTn>
+                                        <p:tgtEl>
+                                          <p:spTgt spid="28"/>
+                                        </p:tgtEl>
+                                        <p:attrNameLst>
+                                          <p:attrName>style.visibility</p:attrName>
+                                        </p:attrNameLst>
+                                      </p:cBhvr>
+                                      <p:to>
+                                        <p:strVal val="visible"/>
+                                      </p:to>
+                                    </p:set>
+                                  </p:childTnLst>
+                                </p:cTn>
+                              </p:par>
+                            </p:childTnLst>
+                          </p:cTn>
+                        </p:par>
+                      </p:childTnLst>
+                    </p:cTn>
+                  </p:par>
+                </p:childTnLst>
+              </p:cTn>
+              <p:prevCondLst>
+                <p:cond evt="onPrev" delay="0">
+                  <p:tgtEl>
+                    <p:sldTgt/>
+                  </p:tgtEl>
+                </p:cond>
+              </p:prevCondLst>
+              <p:nextCondLst>
+                <p:cond evt="onNext" delay="0">
+                  <p:tgtEl>
+                    <p:sldTgt/>
+                  </p:tgtEl>
+                </p:cond>
+              </p:nextCondLst>
+            </p:seq>
+          </p:childTnLst>
+        </p:cTn>
+      </p:par>
+    </p:tnLst>
+    <p:bldLst>
+      <p:bldP spid="7" grpId="0"/>
+      <p:bldP spid="9" grpId="0"/>
+      <p:bldP spid="14" grpId="0"/>
+      <p:bldP spid="19" grpId="0"/>
+      <p:bldP spid="21" grpId="0"/>
+      <p:bldP spid="28" grpId="0" animBg="1"/>
+    </p:bldLst>
+  </p:timing>
+</p:sld>
+</file>
+
+<file path=ppt/slides/slide22.xml><?xml version="1.0" encoding="utf-8"?>
+<p:sld xmlns:a="http://schemas.openxmlformats.org/drawingml/2006/main" xmlns:r="http://schemas.openxmlformats.org/officeDocument/2006/relationships" xmlns:p="http://schemas.openxmlformats.org/presentationml/2006/main">
+  <p:cSld>
+    <p:spTree>
+      <p:nvGrpSpPr>
+        <p:cNvPr id="1" name="">
+          <a:extLst>
+            <a:ext uri="{FF2B5EF4-FFF2-40B4-BE49-F238E27FC236}">
+              <a16:creationId xmlns:a16="http://schemas.microsoft.com/office/drawing/2014/main" id="{2CE96CBD-8139-F7F4-B041-F4B0FA286320}"/>
+            </a:ext>
+          </a:extLst>
+        </p:cNvPr>
+        <p:cNvGrpSpPr/>
+        <p:nvPr/>
+      </p:nvGrpSpPr>
+      <p:grpSpPr>
+        <a:xfrm>
+          <a:off x="0" y="0"/>
+          <a:ext cx="0" cy="0"/>
+          <a:chOff x="0" y="0"/>
+          <a:chExt cx="0" cy="0"/>
+        </a:xfrm>
+      </p:grpSpPr>
+      <p:sp>
+        <p:nvSpPr>
+          <p:cNvPr id="2" name="Title 1">
+            <a:extLst>
+              <a:ext uri="{FF2B5EF4-FFF2-40B4-BE49-F238E27FC236}">
+                <a16:creationId xmlns:a16="http://schemas.microsoft.com/office/drawing/2014/main" id="{632EA577-FB7F-B128-4B9B-87E6321761B4}"/>
+              </a:ext>
+            </a:extLst>
+          </p:cNvPr>
+          <p:cNvSpPr>
+            <a:spLocks noGrp="1"/>
+          </p:cNvSpPr>
+          <p:nvPr>
+            <p:ph type="title"/>
+          </p:nvPr>
+        </p:nvSpPr>
+        <p:spPr>
+          <a:xfrm>
+            <a:off x="381000" y="150813"/>
+            <a:ext cx="10515600" cy="620713"/>
+          </a:xfrm>
+        </p:spPr>
+        <p:txBody>
+          <a:bodyPr>
+            <a:normAutofit fontScale="90000"/>
+          </a:bodyPr>
+          <a:lstStyle/>
+          <a:p>
+            <a:r>
+              <a:rPr lang="en-GB" dirty="0"/>
+              <a:t>Why We Study GenAI in This Course</a:t>
+            </a:r>
+            <a:endParaRPr lang="en-US" dirty="0"/>
+          </a:p>
+        </p:txBody>
+      </p:sp>
+      <p:sp>
+        <p:nvSpPr>
+          <p:cNvPr id="3" name="TextBox 2">
+            <a:extLst>
+              <a:ext uri="{FF2B5EF4-FFF2-40B4-BE49-F238E27FC236}">
+                <a16:creationId xmlns:a16="http://schemas.microsoft.com/office/drawing/2014/main" id="{A5986385-23EF-5116-FA7C-CFD6C03C5EB5}"/>
+              </a:ext>
+            </a:extLst>
+          </p:cNvPr>
+          <p:cNvSpPr txBox="1"/>
+          <p:nvPr/>
+        </p:nvSpPr>
+        <p:spPr>
+          <a:xfrm>
+            <a:off x="697424" y="1290107"/>
+            <a:ext cx="9980908" cy="3385542"/>
+          </a:xfrm>
+          <a:prstGeom prst="rect">
+            <a:avLst/>
+          </a:prstGeom>
+          <a:noFill/>
+        </p:spPr>
+        <p:txBody>
+          <a:bodyPr wrap="square" rtlCol="0">
+            <a:spAutoFit/>
+          </a:bodyPr>
+          <a:lstStyle/>
+          <a:p>
+            <a:pPr marL="285750" indent="-285750">
+              <a:buFont typeface="Arial" panose="020B0604020202020204" pitchFamily="34" charset="0"/>
+              <a:buChar char="•"/>
+            </a:pPr>
+            <a:r>
+              <a:rPr lang="en-GB" sz="2800" dirty="0">
+                <a:latin typeface="Arial" panose="020B0604020202020204" pitchFamily="34" charset="0"/>
+                <a:cs typeface="Arial" panose="020B0604020202020204" pitchFamily="34" charset="0"/>
+              </a:rPr>
+              <a:t>This material comes from ongoing research in my lab.</a:t>
+            </a:r>
+          </a:p>
+          <a:p>
+            <a:pPr marL="285750" indent="-285750">
+              <a:buFont typeface="Arial" panose="020B0604020202020204" pitchFamily="34" charset="0"/>
+              <a:buChar char="•"/>
+            </a:pPr>
+            <a:r>
+              <a:rPr lang="en-GB" sz="2800" dirty="0">
+                <a:latin typeface="Arial" panose="020B0604020202020204" pitchFamily="34" charset="0"/>
+                <a:cs typeface="Arial" panose="020B0604020202020204" pitchFamily="34" charset="0"/>
+              </a:rPr>
+              <a:t>We </a:t>
+            </a:r>
+            <a:r>
+              <a:rPr lang="en-GB" sz="2800" dirty="0" err="1">
+                <a:latin typeface="Arial" panose="020B0604020202020204" pitchFamily="34" charset="0"/>
+                <a:cs typeface="Arial" panose="020B0604020202020204" pitchFamily="34" charset="0"/>
+              </a:rPr>
+              <a:t>analyze</a:t>
+            </a:r>
+            <a:r>
+              <a:rPr lang="en-GB" sz="2800" dirty="0">
+                <a:latin typeface="Arial" panose="020B0604020202020204" pitchFamily="34" charset="0"/>
+                <a:cs typeface="Arial" panose="020B0604020202020204" pitchFamily="34" charset="0"/>
+              </a:rPr>
+              <a:t> real pull requests where AI was used in industry.</a:t>
+            </a:r>
+          </a:p>
+          <a:p>
+            <a:pPr marL="285750" indent="-285750">
+              <a:buFont typeface="Arial" panose="020B0604020202020204" pitchFamily="34" charset="0"/>
+              <a:buChar char="•"/>
+            </a:pPr>
+            <a:r>
+              <a:rPr lang="en-GB" sz="2800" dirty="0">
+                <a:latin typeface="Arial" panose="020B0604020202020204" pitchFamily="34" charset="0"/>
+                <a:cs typeface="Arial" panose="020B0604020202020204" pitchFamily="34" charset="0"/>
+              </a:rPr>
+              <a:t>GenAI tools are now embedded in professional software workflows.</a:t>
+            </a:r>
+          </a:p>
+          <a:p>
+            <a:pPr marL="285750" indent="-285750">
+              <a:buFont typeface="Arial" panose="020B0604020202020204" pitchFamily="34" charset="0"/>
+              <a:buChar char="•"/>
+            </a:pPr>
+            <a:r>
+              <a:rPr lang="en-GB" sz="2800" dirty="0">
+                <a:latin typeface="Arial" panose="020B0604020202020204" pitchFamily="34" charset="0"/>
+                <a:cs typeface="Arial" panose="020B0604020202020204" pitchFamily="34" charset="0"/>
+              </a:rPr>
+              <a:t>Senior engineers are expected to use AI responsibly — not blindly.</a:t>
+            </a:r>
+          </a:p>
+          <a:p>
+            <a:pPr marL="285750" indent="-285750">
+              <a:buFont typeface="Arial" panose="020B0604020202020204" pitchFamily="34" charset="0"/>
+              <a:buChar char="•"/>
+            </a:pPr>
+            <a:endParaRPr lang="en-US" dirty="0"/>
+          </a:p>
+        </p:txBody>
+      </p:sp>
+      <p:sp>
+        <p:nvSpPr>
+          <p:cNvPr id="8" name="TextBox 7">
+            <a:extLst>
+              <a:ext uri="{FF2B5EF4-FFF2-40B4-BE49-F238E27FC236}">
+                <a16:creationId xmlns:a16="http://schemas.microsoft.com/office/drawing/2014/main" id="{40743FD3-D4C7-62D2-331B-FAA5AD4D91F9}"/>
+              </a:ext>
+            </a:extLst>
+          </p:cNvPr>
+          <p:cNvSpPr txBox="1"/>
+          <p:nvPr/>
+        </p:nvSpPr>
+        <p:spPr>
+          <a:xfrm>
+            <a:off x="697424" y="5194231"/>
+            <a:ext cx="10089396" cy="954107"/>
+          </a:xfrm>
+          <a:prstGeom prst="rect">
+            <a:avLst/>
+          </a:prstGeom>
+          <a:noFill/>
+          <a:ln w="28575">
+            <a:solidFill>
+              <a:srgbClr val="0432FF"/>
+            </a:solidFill>
+          </a:ln>
+        </p:spPr>
+        <p:txBody>
+          <a:bodyPr wrap="square">
+            <a:spAutoFit/>
+          </a:bodyPr>
+          <a:lstStyle/>
+          <a:p>
+            <a:r>
+              <a:rPr lang="en-GB" sz="2800" dirty="0">
+                <a:latin typeface="Arial" panose="020B0604020202020204" pitchFamily="34" charset="0"/>
+                <a:cs typeface="Arial" panose="020B0604020202020204" pitchFamily="34" charset="0"/>
+              </a:rPr>
+              <a:t>You are not required to use GenAI. But if you use it, you are expected to use it professionally.</a:t>
+            </a:r>
+            <a:endParaRPr lang="en-US" sz="2800" dirty="0">
+              <a:latin typeface="Arial" panose="020B0604020202020204" pitchFamily="34" charset="0"/>
+              <a:cs typeface="Arial" panose="020B0604020202020204" pitchFamily="34" charset="0"/>
+            </a:endParaRPr>
+          </a:p>
+        </p:txBody>
+      </p:sp>
+    </p:spTree>
+    <p:extLst>
+      <p:ext uri="{BB962C8B-B14F-4D97-AF65-F5344CB8AC3E}">
+        <p14:creationId xmlns:p14="http://schemas.microsoft.com/office/powerpoint/2010/main" val="3114039088"/>
+      </p:ext>
+    </p:extLst>
+  </p:cSld>
+  <p:clrMapOvr>
+    <a:masterClrMapping/>
+  </p:clrMapOvr>
+  <p:timing>
+    <p:tnLst>
+      <p:par>
+        <p:cTn id="1" dur="indefinite" restart="never" nodeType="tmRoot">
+          <p:childTnLst>
+            <p:seq concurrent="1" nextAc="seek">
+              <p:cTn id="2" dur="indefinite" nodeType="mainSeq">
+                <p:childTnLst>
+                  <p:par>
+                    <p:cTn id="3" fill="hold">
+                      <p:stCondLst>
+                        <p:cond delay="indefinite"/>
+                      </p:stCondLst>
+                      <p:childTnLst>
+                        <p:par>
+                          <p:cTn id="4" fill="hold">
+                            <p:stCondLst>
+                              <p:cond delay="0"/>
+                            </p:stCondLst>
+                            <p:childTnLst>
+                              <p:par>
+                                <p:cTn id="5" presetID="1" presetClass="entr" presetSubtype="0" fill="hold" grpId="0" nodeType="clickEffect">
+                                  <p:stCondLst>
+                                    <p:cond delay="0"/>
+                                  </p:stCondLst>
+                                  <p:childTnLst>
+                                    <p:set>
+                                      <p:cBhvr>
+                                        <p:cTn id="6" dur="1" fill="hold">
+                                          <p:stCondLst>
+                                            <p:cond delay="0"/>
+                                          </p:stCondLst>
+                                        </p:cTn>
+                                        <p:tgtEl>
+                                          <p:spTgt spid="8"/>
+                                        </p:tgtEl>
+                                        <p:attrNameLst>
+                                          <p:attrName>style.visibility</p:attrName>
+                                        </p:attrNameLst>
+                                      </p:cBhvr>
+                                      <p:to>
+                                        <p:strVal val="visible"/>
+                                      </p:to>
+                                    </p:set>
+                                  </p:childTnLst>
+                                </p:cTn>
+                              </p:par>
+                            </p:childTnLst>
+                          </p:cTn>
+                        </p:par>
+                      </p:childTnLst>
+                    </p:cTn>
+                  </p:par>
+                </p:childTnLst>
+              </p:cTn>
+              <p:prevCondLst>
+                <p:cond evt="onPrev" delay="0">
+                  <p:tgtEl>
+                    <p:sldTgt/>
+                  </p:tgtEl>
+                </p:cond>
+              </p:prevCondLst>
+              <p:nextCondLst>
+                <p:cond evt="onNext" delay="0">
+                  <p:tgtEl>
+                    <p:sldTgt/>
+                  </p:tgtEl>
+                </p:cond>
+              </p:nextCondLst>
+            </p:seq>
+          </p:childTnLst>
+        </p:cTn>
+      </p:par>
+    </p:tnLst>
+    <p:bldLst>
+      <p:bldP spid="8" grpId="0" animBg="1"/>
+    </p:bldLst>
+  </p:timing>
+</p:sld>
+</file>
+
+<file path=ppt/slides/slide23.xml><?xml version="1.0" encoding="utf-8"?>
+<p:sld xmlns:a="http://schemas.openxmlformats.org/drawingml/2006/main" xmlns:r="http://schemas.openxmlformats.org/officeDocument/2006/relationships" xmlns:p="http://schemas.openxmlformats.org/presentationml/2006/main">
+  <p:cSld>
+    <p:spTree>
+      <p:nvGrpSpPr>
+        <p:cNvPr id="1" name="">
+          <a:extLst>
+            <a:ext uri="{FF2B5EF4-FFF2-40B4-BE49-F238E27FC236}">
+              <a16:creationId xmlns:a16="http://schemas.microsoft.com/office/drawing/2014/main" id="{62378A88-551B-A08F-A354-97CDC1C742D5}"/>
+            </a:ext>
+          </a:extLst>
+        </p:cNvPr>
+        <p:cNvGrpSpPr/>
+        <p:nvPr/>
+      </p:nvGrpSpPr>
+      <p:grpSpPr>
+        <a:xfrm>
+          <a:off x="0" y="0"/>
+          <a:ext cx="0" cy="0"/>
+          <a:chOff x="0" y="0"/>
+          <a:chExt cx="0" cy="0"/>
+        </a:xfrm>
+      </p:grpSpPr>
+      <p:sp>
+        <p:nvSpPr>
+          <p:cNvPr id="2" name="Title 1">
+            <a:extLst>
+              <a:ext uri="{FF2B5EF4-FFF2-40B4-BE49-F238E27FC236}">
+                <a16:creationId xmlns:a16="http://schemas.microsoft.com/office/drawing/2014/main" id="{8CF40BEF-4DB7-4BBF-DE93-1C7CC0424B30}"/>
+              </a:ext>
+            </a:extLst>
+          </p:cNvPr>
+          <p:cNvSpPr>
+            <a:spLocks noGrp="1"/>
+          </p:cNvSpPr>
+          <p:nvPr>
+            <p:ph type="title"/>
+          </p:nvPr>
+        </p:nvSpPr>
+        <p:spPr>
+          <a:xfrm>
+            <a:off x="381000" y="150813"/>
+            <a:ext cx="10515600" cy="620713"/>
+          </a:xfrm>
+        </p:spPr>
+        <p:txBody>
+          <a:bodyPr>
+            <a:noAutofit/>
+          </a:bodyPr>
+          <a:lstStyle/>
+          <a:p>
+            <a:r>
+              <a:rPr lang="en-GB" sz="3600" dirty="0">
+                <a:latin typeface="Arial" panose="020B0604020202020204" pitchFamily="34" charset="0"/>
+                <a:cs typeface="Arial" panose="020B0604020202020204" pitchFamily="34" charset="0"/>
+              </a:rPr>
+              <a:t>Professional Use of GenAI</a:t>
+            </a:r>
+            <a:endParaRPr lang="en-US" sz="3600" dirty="0">
+              <a:latin typeface="Arial" panose="020B0604020202020204" pitchFamily="34" charset="0"/>
+              <a:cs typeface="Arial" panose="020B0604020202020204" pitchFamily="34" charset="0"/>
+            </a:endParaRPr>
+          </a:p>
+        </p:txBody>
+      </p:sp>
+      <p:sp>
+        <p:nvSpPr>
+          <p:cNvPr id="3" name="TextBox 2">
+            <a:extLst>
+              <a:ext uri="{FF2B5EF4-FFF2-40B4-BE49-F238E27FC236}">
+                <a16:creationId xmlns:a16="http://schemas.microsoft.com/office/drawing/2014/main" id="{7161ECA7-483C-6077-264C-56221E2D70F8}"/>
+              </a:ext>
+            </a:extLst>
+          </p:cNvPr>
+          <p:cNvSpPr txBox="1"/>
+          <p:nvPr/>
+        </p:nvSpPr>
+        <p:spPr>
+          <a:xfrm>
+            <a:off x="697424" y="1290107"/>
+            <a:ext cx="9980908" cy="2954655"/>
+          </a:xfrm>
+          <a:prstGeom prst="rect">
+            <a:avLst/>
+          </a:prstGeom>
+          <a:noFill/>
+        </p:spPr>
+        <p:txBody>
+          <a:bodyPr wrap="square" rtlCol="0">
+            <a:spAutoFit/>
+          </a:bodyPr>
+          <a:lstStyle/>
+          <a:p>
+            <a:r>
+              <a:rPr lang="en-GB" sz="2800" dirty="0">
+                <a:latin typeface="Arial" panose="020B0604020202020204" pitchFamily="34" charset="0"/>
+                <a:cs typeface="Arial" panose="020B0604020202020204" pitchFamily="34" charset="0"/>
+              </a:rPr>
+              <a:t>If you chose to use GenAI in your project:</a:t>
+            </a:r>
+          </a:p>
+          <a:p>
+            <a:pPr marL="285750" indent="-285750">
+              <a:buFont typeface="Arial" panose="020B0604020202020204" pitchFamily="34" charset="0"/>
+              <a:buChar char="•"/>
+            </a:pPr>
+            <a:r>
+              <a:rPr lang="en-GB" sz="2800" dirty="0"/>
+              <a:t>Demonstrate understanding of the final code.</a:t>
+            </a:r>
+          </a:p>
+          <a:p>
+            <a:pPr marL="285750" indent="-285750">
+              <a:buFont typeface="Arial" panose="020B0604020202020204" pitchFamily="34" charset="0"/>
+              <a:buChar char="•"/>
+            </a:pPr>
+            <a:r>
+              <a:rPr lang="en-GB" sz="2800" dirty="0"/>
+              <a:t>Explain key design decisions in your PR</a:t>
+            </a:r>
+            <a:r>
+              <a:rPr lang="en-GB" sz="2800" dirty="0">
+                <a:latin typeface="Arial" panose="020B0604020202020204" pitchFamily="34" charset="0"/>
+                <a:cs typeface="Arial" panose="020B0604020202020204" pitchFamily="34" charset="0"/>
+              </a:rPr>
+              <a:t>.</a:t>
+            </a:r>
+          </a:p>
+          <a:p>
+            <a:pPr marL="285750" indent="-285750">
+              <a:buFont typeface="Arial" panose="020B0604020202020204" pitchFamily="34" charset="0"/>
+              <a:buChar char="•"/>
+            </a:pPr>
+            <a:r>
+              <a:rPr lang="en-GB" sz="2800" dirty="0"/>
+              <a:t>Justify non-trivial changes</a:t>
+            </a:r>
+            <a:r>
+              <a:rPr lang="en-GB" sz="2800" dirty="0">
+                <a:latin typeface="Arial" panose="020B0604020202020204" pitchFamily="34" charset="0"/>
+                <a:cs typeface="Arial" panose="020B0604020202020204" pitchFamily="34" charset="0"/>
+              </a:rPr>
+              <a:t>.</a:t>
+            </a:r>
+          </a:p>
+          <a:p>
+            <a:pPr marL="285750" indent="-285750">
+              <a:buFont typeface="Arial" panose="020B0604020202020204" pitchFamily="34" charset="0"/>
+              <a:buChar char="•"/>
+            </a:pPr>
+            <a:r>
+              <a:rPr lang="en-GB" sz="2800" dirty="0"/>
+              <a:t>Add tests for AI-assisted logic</a:t>
+            </a:r>
+            <a:r>
+              <a:rPr lang="en-GB" sz="2800" dirty="0">
+                <a:latin typeface="Arial" panose="020B0604020202020204" pitchFamily="34" charset="0"/>
+                <a:cs typeface="Arial" panose="020B0604020202020204" pitchFamily="34" charset="0"/>
+              </a:rPr>
+              <a:t>.</a:t>
+            </a:r>
+          </a:p>
+          <a:p>
+            <a:pPr marL="285750" indent="-285750">
+              <a:buFont typeface="Arial" panose="020B0604020202020204" pitchFamily="34" charset="0"/>
+              <a:buChar char="•"/>
+            </a:pPr>
+            <a:r>
+              <a:rPr lang="en-GB" sz="2800" dirty="0"/>
+              <a:t>Be prepared to defend your implementation in review.</a:t>
+            </a:r>
+            <a:endParaRPr lang="en-GB" sz="2800" dirty="0">
+              <a:latin typeface="Arial" panose="020B0604020202020204" pitchFamily="34" charset="0"/>
+              <a:cs typeface="Arial" panose="020B0604020202020204" pitchFamily="34" charset="0"/>
+            </a:endParaRPr>
+          </a:p>
+          <a:p>
+            <a:pPr marL="285750" indent="-285750">
+              <a:buFont typeface="Arial" panose="020B0604020202020204" pitchFamily="34" charset="0"/>
+              <a:buChar char="•"/>
+            </a:pPr>
+            <a:endParaRPr lang="en-US" dirty="0"/>
+          </a:p>
+        </p:txBody>
+      </p:sp>
+      <p:sp>
+        <p:nvSpPr>
+          <p:cNvPr id="8" name="TextBox 7">
+            <a:extLst>
+              <a:ext uri="{FF2B5EF4-FFF2-40B4-BE49-F238E27FC236}">
+                <a16:creationId xmlns:a16="http://schemas.microsoft.com/office/drawing/2014/main" id="{75C2B84F-A9C3-1D28-1CE1-112B223BFDF4}"/>
+              </a:ext>
+            </a:extLst>
+          </p:cNvPr>
+          <p:cNvSpPr txBox="1"/>
+          <p:nvPr/>
+        </p:nvSpPr>
+        <p:spPr>
+          <a:xfrm>
+            <a:off x="381000" y="5044673"/>
+            <a:ext cx="10647335" cy="523220"/>
+          </a:xfrm>
+          <a:prstGeom prst="rect">
+            <a:avLst/>
+          </a:prstGeom>
+          <a:noFill/>
+          <a:ln w="28575">
+            <a:solidFill>
+              <a:srgbClr val="0432FF"/>
+            </a:solidFill>
+          </a:ln>
+        </p:spPr>
+        <p:txBody>
+          <a:bodyPr wrap="square">
+            <a:spAutoFit/>
+          </a:bodyPr>
+          <a:lstStyle/>
+          <a:p>
+            <a:r>
+              <a:rPr lang="en-GB" sz="2800" dirty="0"/>
+              <a:t>Unexplained code is poor engineering — regardless of who wrote it.</a:t>
+            </a:r>
+          </a:p>
+        </p:txBody>
+      </p:sp>
+    </p:spTree>
+    <p:extLst>
+      <p:ext uri="{BB962C8B-B14F-4D97-AF65-F5344CB8AC3E}">
+        <p14:creationId xmlns:p14="http://schemas.microsoft.com/office/powerpoint/2010/main" val="1888693385"/>
+      </p:ext>
+    </p:extLst>
+  </p:cSld>
+  <p:clrMapOvr>
+    <a:masterClrMapping/>
+  </p:clrMapOvr>
+  <p:timing>
+    <p:tnLst>
+      <p:par>
+        <p:cTn id="1" dur="indefinite" restart="never" nodeType="tmRoot">
+          <p:childTnLst>
+            <p:seq concurrent="1" nextAc="seek">
+              <p:cTn id="2" dur="indefinite" nodeType="mainSeq">
+                <p:childTnLst>
+                  <p:par>
+                    <p:cTn id="3" fill="hold">
+                      <p:stCondLst>
+                        <p:cond delay="indefinite"/>
+                      </p:stCondLst>
+                      <p:childTnLst>
+                        <p:par>
+                          <p:cTn id="4" fill="hold">
+                            <p:stCondLst>
+                              <p:cond delay="0"/>
+                            </p:stCondLst>
+                            <p:childTnLst>
+                              <p:par>
+                                <p:cTn id="5" presetID="1" presetClass="entr" presetSubtype="0" fill="hold" grpId="0" nodeType="clickEffect">
+                                  <p:stCondLst>
+                                    <p:cond delay="0"/>
+                                  </p:stCondLst>
+                                  <p:childTnLst>
+                                    <p:set>
+                                      <p:cBhvr>
+                                        <p:cTn id="6" dur="1" fill="hold">
+                                          <p:stCondLst>
+                                            <p:cond delay="0"/>
+                                          </p:stCondLst>
+                                        </p:cTn>
+                                        <p:tgtEl>
+                                          <p:spTgt spid="8"/>
+                                        </p:tgtEl>
+                                        <p:attrNameLst>
+                                          <p:attrName>style.visibility</p:attrName>
+                                        </p:attrNameLst>
+                                      </p:cBhvr>
+                                      <p:to>
+                                        <p:strVal val="visible"/>
+                                      </p:to>
+                                    </p:set>
+                                  </p:childTnLst>
+                                </p:cTn>
+                              </p:par>
+                            </p:childTnLst>
+                          </p:cTn>
+                        </p:par>
+                      </p:childTnLst>
+                    </p:cTn>
+                  </p:par>
+                </p:childTnLst>
+              </p:cTn>
+              <p:prevCondLst>
+                <p:cond evt="onPrev" delay="0">
+                  <p:tgtEl>
+                    <p:sldTgt/>
+                  </p:tgtEl>
+                </p:cond>
+              </p:prevCondLst>
+              <p:nextCondLst>
+                <p:cond evt="onNext" delay="0">
+                  <p:tgtEl>
+                    <p:sldTgt/>
+                  </p:tgtEl>
+                </p:cond>
+              </p:nextCondLst>
+            </p:seq>
+          </p:childTnLst>
+        </p:cTn>
+      </p:par>
+    </p:tnLst>
+    <p:bldLst>
+      <p:bldP spid="8" grpId="0" animBg="1"/>
+    </p:bldLst>
+  </p:timing>
+</p:sld>
+</file>
+
+<file path=ppt/slides/slide24.xml><?xml version="1.0" encoding="utf-8"?>
+<p:sld xmlns:a="http://schemas.openxmlformats.org/drawingml/2006/main" xmlns:r="http://schemas.openxmlformats.org/officeDocument/2006/relationships" xmlns:p="http://schemas.openxmlformats.org/presentationml/2006/main">
+  <p:cSld>
+    <p:spTree>
+      <p:nvGrpSpPr>
+        <p:cNvPr id="1" name="">
+          <a:extLst>
+            <a:ext uri="{FF2B5EF4-FFF2-40B4-BE49-F238E27FC236}">
+              <a16:creationId xmlns:a16="http://schemas.microsoft.com/office/drawing/2014/main" id="{25AB2170-69E2-44EB-1DF6-677213405A5C}"/>
+            </a:ext>
+          </a:extLst>
+        </p:cNvPr>
+        <p:cNvGrpSpPr/>
+        <p:nvPr/>
+      </p:nvGrpSpPr>
+      <p:grpSpPr>
+        <a:xfrm>
+          <a:off x="0" y="0"/>
+          <a:ext cx="0" cy="0"/>
+          <a:chOff x="0" y="0"/>
+          <a:chExt cx="0" cy="0"/>
+        </a:xfrm>
+      </p:grpSpPr>
+      <p:sp>
+        <p:nvSpPr>
+          <p:cNvPr id="2" name="Title 1">
+            <a:extLst>
+              <a:ext uri="{FF2B5EF4-FFF2-40B4-BE49-F238E27FC236}">
+                <a16:creationId xmlns:a16="http://schemas.microsoft.com/office/drawing/2014/main" id="{B35B58B9-129C-460A-69CA-486B1E306F47}"/>
+              </a:ext>
+            </a:extLst>
+          </p:cNvPr>
+          <p:cNvSpPr>
+            <a:spLocks noGrp="1"/>
+          </p:cNvSpPr>
+          <p:nvPr>
+            <p:ph type="title"/>
+          </p:nvPr>
+        </p:nvSpPr>
+        <p:spPr>
+          <a:xfrm>
+            <a:off x="381000" y="150813"/>
+            <a:ext cx="10515600" cy="620713"/>
+          </a:xfrm>
+        </p:spPr>
+        <p:txBody>
+          <a:bodyPr>
+            <a:noAutofit/>
+          </a:bodyPr>
+          <a:lstStyle/>
+          <a:p>
+            <a:r>
+              <a:rPr lang="en-GB" sz="3600" dirty="0"/>
+              <a:t>What We Evaluate in Pull Requests</a:t>
+            </a:r>
+            <a:endParaRPr lang="en-US" sz="3600" dirty="0">
+              <a:latin typeface="Arial" panose="020B0604020202020204" pitchFamily="34" charset="0"/>
+              <a:cs typeface="Arial" panose="020B0604020202020204" pitchFamily="34" charset="0"/>
+            </a:endParaRPr>
+          </a:p>
+        </p:txBody>
+      </p:sp>
+      <p:sp>
+        <p:nvSpPr>
+          <p:cNvPr id="3" name="TextBox 2">
+            <a:extLst>
+              <a:ext uri="{FF2B5EF4-FFF2-40B4-BE49-F238E27FC236}">
+                <a16:creationId xmlns:a16="http://schemas.microsoft.com/office/drawing/2014/main" id="{C04B868D-09CB-E8F8-BACB-19340258A4A8}"/>
+              </a:ext>
+            </a:extLst>
+          </p:cNvPr>
+          <p:cNvSpPr txBox="1"/>
+          <p:nvPr/>
+        </p:nvSpPr>
+        <p:spPr>
+          <a:xfrm>
+            <a:off x="697424" y="1290107"/>
+            <a:ext cx="9980908" cy="2954655"/>
+          </a:xfrm>
+          <a:prstGeom prst="rect">
+            <a:avLst/>
+          </a:prstGeom>
+          <a:noFill/>
+        </p:spPr>
+        <p:txBody>
+          <a:bodyPr wrap="square" rtlCol="0">
+            <a:spAutoFit/>
+          </a:bodyPr>
+          <a:lstStyle/>
+          <a:p>
+            <a:pPr marL="285750" indent="-285750">
+              <a:buFont typeface="Arial" panose="020B0604020202020204" pitchFamily="34" charset="0"/>
+              <a:buChar char="•"/>
+            </a:pPr>
+            <a:r>
+              <a:rPr lang="en-GB" sz="2800" dirty="0"/>
+              <a:t>PR description clarity.</a:t>
+            </a:r>
+          </a:p>
+          <a:p>
+            <a:pPr marL="285750" indent="-285750">
+              <a:buFont typeface="Arial" panose="020B0604020202020204" pitchFamily="34" charset="0"/>
+              <a:buChar char="•"/>
+            </a:pPr>
+            <a:r>
+              <a:rPr lang="en-GB" sz="2800" dirty="0"/>
+              <a:t>Commit discipline</a:t>
+            </a:r>
+            <a:r>
+              <a:rPr lang="en-GB" sz="2800" dirty="0">
+                <a:latin typeface="Arial" panose="020B0604020202020204" pitchFamily="34" charset="0"/>
+                <a:cs typeface="Arial" panose="020B0604020202020204" pitchFamily="34" charset="0"/>
+              </a:rPr>
+              <a:t>.</a:t>
+            </a:r>
+          </a:p>
+          <a:p>
+            <a:pPr marL="285750" indent="-285750">
+              <a:buFont typeface="Arial" panose="020B0604020202020204" pitchFamily="34" charset="0"/>
+              <a:buChar char="•"/>
+            </a:pPr>
+            <a:r>
+              <a:rPr lang="en-GB" sz="2800" dirty="0"/>
+              <a:t>Review depth</a:t>
+            </a:r>
+            <a:r>
+              <a:rPr lang="en-GB" sz="2800" dirty="0">
+                <a:latin typeface="Arial" panose="020B0604020202020204" pitchFamily="34" charset="0"/>
+                <a:cs typeface="Arial" panose="020B0604020202020204" pitchFamily="34" charset="0"/>
+              </a:rPr>
+              <a:t>.</a:t>
+            </a:r>
+          </a:p>
+          <a:p>
+            <a:pPr marL="285750" indent="-285750">
+              <a:buFont typeface="Arial" panose="020B0604020202020204" pitchFamily="34" charset="0"/>
+              <a:buChar char="•"/>
+            </a:pPr>
+            <a:r>
+              <a:rPr lang="en-GB" sz="2800" dirty="0"/>
+              <a:t>Test coverage</a:t>
+            </a:r>
+            <a:r>
+              <a:rPr lang="en-GB" sz="2800" dirty="0">
+                <a:latin typeface="Arial" panose="020B0604020202020204" pitchFamily="34" charset="0"/>
+                <a:cs typeface="Arial" panose="020B0604020202020204" pitchFamily="34" charset="0"/>
+              </a:rPr>
+              <a:t>.</a:t>
+            </a:r>
+          </a:p>
+          <a:p>
+            <a:pPr marL="285750" indent="-285750">
+              <a:buFont typeface="Arial" panose="020B0604020202020204" pitchFamily="34" charset="0"/>
+              <a:buChar char="•"/>
+            </a:pPr>
+            <a:r>
+              <a:rPr lang="en-GB" sz="2800" dirty="0"/>
+              <a:t>Architectural reasoning.</a:t>
+            </a:r>
+          </a:p>
+          <a:p>
+            <a:pPr marL="285750" indent="-285750">
+              <a:buFont typeface="Arial" panose="020B0604020202020204" pitchFamily="34" charset="0"/>
+              <a:buChar char="•"/>
+            </a:pPr>
+            <a:r>
+              <a:rPr lang="en-GB" sz="2800" dirty="0"/>
+              <a:t>Quality of integration decisions</a:t>
+            </a:r>
+            <a:endParaRPr lang="en-GB" sz="2800" dirty="0">
+              <a:latin typeface="Arial" panose="020B0604020202020204" pitchFamily="34" charset="0"/>
+              <a:cs typeface="Arial" panose="020B0604020202020204" pitchFamily="34" charset="0"/>
+            </a:endParaRPr>
+          </a:p>
+          <a:p>
+            <a:pPr marL="285750" indent="-285750">
+              <a:buFont typeface="Arial" panose="020B0604020202020204" pitchFamily="34" charset="0"/>
+              <a:buChar char="•"/>
+            </a:pPr>
+            <a:endParaRPr lang="en-US" dirty="0"/>
+          </a:p>
+        </p:txBody>
+      </p:sp>
+      <p:sp>
+        <p:nvSpPr>
+          <p:cNvPr id="8" name="TextBox 7">
+            <a:extLst>
+              <a:ext uri="{FF2B5EF4-FFF2-40B4-BE49-F238E27FC236}">
+                <a16:creationId xmlns:a16="http://schemas.microsoft.com/office/drawing/2014/main" id="{DE8123A0-0647-22E9-92CC-F4DF5A607EE7}"/>
+              </a:ext>
+            </a:extLst>
+          </p:cNvPr>
+          <p:cNvSpPr txBox="1"/>
+          <p:nvPr/>
+        </p:nvSpPr>
+        <p:spPr>
+          <a:xfrm>
+            <a:off x="381000" y="5044673"/>
+            <a:ext cx="11082867" cy="507831"/>
+          </a:xfrm>
+          <a:prstGeom prst="rect">
+            <a:avLst/>
+          </a:prstGeom>
+          <a:noFill/>
+          <a:ln w="28575">
+            <a:solidFill>
+              <a:srgbClr val="0432FF"/>
+            </a:solidFill>
+          </a:ln>
+        </p:spPr>
+        <p:txBody>
+          <a:bodyPr wrap="square">
+            <a:spAutoFit/>
+          </a:bodyPr>
+          <a:lstStyle/>
+          <a:p>
+            <a:r>
+              <a:rPr lang="en-GB" sz="2700" dirty="0"/>
+              <a:t>We evaluate how thoughtfully tools are used — not whether they are used.</a:t>
+            </a:r>
+          </a:p>
+        </p:txBody>
+      </p:sp>
+    </p:spTree>
+    <p:extLst>
+      <p:ext uri="{BB962C8B-B14F-4D97-AF65-F5344CB8AC3E}">
+        <p14:creationId xmlns:p14="http://schemas.microsoft.com/office/powerpoint/2010/main" val="3522951219"/>
+      </p:ext>
+    </p:extLst>
+  </p:cSld>
+  <p:clrMapOvr>
+    <a:masterClrMapping/>
+  </p:clrMapOvr>
+  <p:timing>
+    <p:tnLst>
+      <p:par>
+        <p:cTn id="1" dur="indefinite" restart="never" nodeType="tmRoot">
+          <p:childTnLst>
+            <p:seq concurrent="1" nextAc="seek">
+              <p:cTn id="2" dur="indefinite" nodeType="mainSeq">
+                <p:childTnLst>
+                  <p:par>
+                    <p:cTn id="3" fill="hold">
+                      <p:stCondLst>
+                        <p:cond delay="indefinite"/>
+                      </p:stCondLst>
+                      <p:childTnLst>
+                        <p:par>
+                          <p:cTn id="4" fill="hold">
+                            <p:stCondLst>
+                              <p:cond delay="0"/>
+                            </p:stCondLst>
+                            <p:childTnLst>
+                              <p:par>
+                                <p:cTn id="5" presetID="1" presetClass="entr" presetSubtype="0" fill="hold" grpId="0" nodeType="clickEffect">
+                                  <p:stCondLst>
+                                    <p:cond delay="0"/>
+                                  </p:stCondLst>
+                                  <p:childTnLst>
+                                    <p:set>
+                                      <p:cBhvr>
+                                        <p:cTn id="6" dur="1" fill="hold">
+                                          <p:stCondLst>
+                                            <p:cond delay="0"/>
+                                          </p:stCondLst>
+                                        </p:cTn>
+                                        <p:tgtEl>
+                                          <p:spTgt spid="8"/>
+                                        </p:tgtEl>
+                                        <p:attrNameLst>
+                                          <p:attrName>style.visibility</p:attrName>
+                                        </p:attrNameLst>
+                                      </p:cBhvr>
+                                      <p:to>
+                                        <p:strVal val="visible"/>
+                                      </p:to>
+                                    </p:set>
+                                  </p:childTnLst>
+                                </p:cTn>
+                              </p:par>
+                            </p:childTnLst>
+                          </p:cTn>
+                        </p:par>
+                      </p:childTnLst>
+                    </p:cTn>
+                  </p:par>
+                </p:childTnLst>
+              </p:cTn>
+              <p:prevCondLst>
+                <p:cond evt="onPrev" delay="0">
+                  <p:tgtEl>
+                    <p:sldTgt/>
+                  </p:tgtEl>
+                </p:cond>
+              </p:prevCondLst>
+              <p:nextCondLst>
+                <p:cond evt="onNext" delay="0">
+                  <p:tgtEl>
+                    <p:sldTgt/>
+                  </p:tgtEl>
+                </p:cond>
+              </p:nextCondLst>
+            </p:seq>
+          </p:childTnLst>
+        </p:cTn>
+      </p:par>
+    </p:tnLst>
+    <p:bldLst>
+      <p:bldP spid="8" grpId="0" animBg="1"/>
     </p:bldLst>
   </p:timing>
 </p:sld>
